--- a/presentation/Prezentacija.pptx
+++ b/presentation/Prezentacija.pptx
@@ -1057,7 +1057,7 @@
           </a:prstGeom>
           <a:extLst>
             <a:ext uri="{C572A759-6A51-4108-AA02-DFA0A04FC94B}">
-              <ma14:wrappingTextBoxFlag xmlns:ma14="http://schemas.microsoft.com/office/mac/drawingml/2011/main" xmlns="" val="0"/>
+              <ma14:wrappingTextBoxFlag xmlns="" xmlns:ma14="http://schemas.microsoft.com/office/mac/drawingml/2011/main" val="0"/>
             </a:ext>
           </a:extLst>
         </p:spPr>
@@ -1230,7 +1230,7 @@
           </a:prstGeom>
           <a:extLst>
             <a:ext uri="{C572A759-6A51-4108-AA02-DFA0A04FC94B}">
-              <ma14:wrappingTextBoxFlag xmlns:ma14="http://schemas.microsoft.com/office/mac/drawingml/2011/main" xmlns="" val="0"/>
+              <ma14:wrappingTextBoxFlag xmlns="" xmlns:ma14="http://schemas.microsoft.com/office/mac/drawingml/2011/main" val="0"/>
             </a:ext>
           </a:extLst>
         </p:spPr>
@@ -1637,7 +1637,7 @@
           </a:prstGeom>
           <a:extLst>
             <a:ext uri="{C572A759-6A51-4108-AA02-DFA0A04FC94B}">
-              <ma14:wrappingTextBoxFlag xmlns:ma14="http://schemas.microsoft.com/office/mac/drawingml/2011/main" xmlns="" val="0"/>
+              <ma14:wrappingTextBoxFlag xmlns="" xmlns:ma14="http://schemas.microsoft.com/office/mac/drawingml/2011/main" val="0"/>
             </a:ext>
           </a:extLst>
         </p:spPr>
@@ -3129,7 +3129,7 @@
           </a:prstGeom>
           <a:extLst>
             <a:ext uri="{C572A759-6A51-4108-AA02-DFA0A04FC94B}">
-              <ma14:wrappingTextBoxFlag xmlns:ma14="http://schemas.microsoft.com/office/mac/drawingml/2011/main" xmlns="" val="0"/>
+              <ma14:wrappingTextBoxFlag xmlns="" xmlns:ma14="http://schemas.microsoft.com/office/mac/drawingml/2011/main" val="0"/>
             </a:ext>
           </a:extLst>
         </p:spPr>
@@ -3646,7 +3646,7 @@
           </a:prstGeom>
           <a:extLst>
             <a:ext uri="{C572A759-6A51-4108-AA02-DFA0A04FC94B}">
-              <ma14:wrappingTextBoxFlag xmlns:ma14="http://schemas.microsoft.com/office/mac/drawingml/2011/main" xmlns="" val="0"/>
+              <ma14:wrappingTextBoxFlag xmlns="" xmlns:ma14="http://schemas.microsoft.com/office/mac/drawingml/2011/main" val="0"/>
             </a:ext>
           </a:extLst>
         </p:spPr>
@@ -4379,7 +4379,7 @@
           </a:prstGeom>
           <a:extLst>
             <a:ext uri="{C572A759-6A51-4108-AA02-DFA0A04FC94B}">
-              <ma14:wrappingTextBoxFlag xmlns:ma14="http://schemas.microsoft.com/office/mac/drawingml/2011/main" xmlns="" val="0"/>
+              <ma14:wrappingTextBoxFlag xmlns="" xmlns:ma14="http://schemas.microsoft.com/office/mac/drawingml/2011/main" val="0"/>
             </a:ext>
           </a:extLst>
         </p:spPr>
@@ -6432,7 +6432,7 @@
           </a:prstGeom>
           <a:extLst>
             <a:ext uri="{C572A759-6A51-4108-AA02-DFA0A04FC94B}">
-              <ma14:wrappingTextBoxFlag xmlns:ma14="http://schemas.microsoft.com/office/mac/drawingml/2011/main" xmlns="" val="0"/>
+              <ma14:wrappingTextBoxFlag xmlns="" xmlns:ma14="http://schemas.microsoft.com/office/mac/drawingml/2011/main" val="0"/>
             </a:ext>
           </a:extLst>
         </p:spPr>
@@ -8162,146 +8162,6 @@
               <a:latin typeface="Arial" panose="020B0604020202020204" pitchFamily="34" charset="0"/>
               <a:cs typeface="Arial" panose="020B0604020202020204" pitchFamily="34" charset="0"/>
             </a:endParaRPr>
-          </a:p>
-          <a:p>
-            <a:pPr>
-              <a:lnSpc>
-                <a:spcPct val="105000"/>
-              </a:lnSpc>
-              <a:spcBef>
-                <a:spcPts val="800"/>
-              </a:spcBef>
-            </a:pPr>
-            <a:r>
-              <a:rPr sz="1200" dirty="0">
-                <a:solidFill>
-                  <a:srgbClr val="E5EBF5"/>
-                </a:solidFill>
-                <a:latin typeface="Arial" panose="020B0604020202020204" pitchFamily="34" charset="0"/>
-                <a:cs typeface="Arial" panose="020B0604020202020204" pitchFamily="34" charset="0"/>
-              </a:rPr>
-              <a:t>AC </a:t>
-            </a:r>
-            <a:r>
-              <a:rPr sz="1200" dirty="0" err="1">
-                <a:solidFill>
-                  <a:srgbClr val="E5EBF5"/>
-                </a:solidFill>
-                <a:latin typeface="Arial" panose="020B0604020202020204" pitchFamily="34" charset="0"/>
-                <a:cs typeface="Arial" panose="020B0604020202020204" pitchFamily="34" charset="0"/>
-              </a:rPr>
-              <a:t>mreže</a:t>
-            </a:r>
-            <a:r>
-              <a:rPr sz="1200" dirty="0">
-                <a:solidFill>
-                  <a:srgbClr val="E5EBF5"/>
-                </a:solidFill>
-                <a:latin typeface="Arial" panose="020B0604020202020204" pitchFamily="34" charset="0"/>
-                <a:cs typeface="Arial" panose="020B0604020202020204" pitchFamily="34" charset="0"/>
-              </a:rPr>
-              <a:t> </a:t>
-            </a:r>
-            <a:r>
-              <a:rPr sz="1200" dirty="0" err="1">
-                <a:solidFill>
-                  <a:srgbClr val="E5EBF5"/>
-                </a:solidFill>
-                <a:latin typeface="Arial" panose="020B0604020202020204" pitchFamily="34" charset="0"/>
-                <a:cs typeface="Arial" panose="020B0604020202020204" pitchFamily="34" charset="0"/>
-              </a:rPr>
-              <a:t>su</a:t>
-            </a:r>
-            <a:r>
-              <a:rPr sz="1200" dirty="0">
-                <a:solidFill>
-                  <a:srgbClr val="E5EBF5"/>
-                </a:solidFill>
-                <a:latin typeface="Arial" panose="020B0604020202020204" pitchFamily="34" charset="0"/>
-                <a:cs typeface="Arial" panose="020B0604020202020204" pitchFamily="34" charset="0"/>
-              </a:rPr>
-              <a:t> </a:t>
-            </a:r>
-            <a:r>
-              <a:rPr sz="1200" dirty="0" err="1">
-                <a:solidFill>
-                  <a:srgbClr val="E5EBF5"/>
-                </a:solidFill>
-                <a:latin typeface="Arial" panose="020B0604020202020204" pitchFamily="34" charset="0"/>
-                <a:cs typeface="Arial" panose="020B0604020202020204" pitchFamily="34" charset="0"/>
-              </a:rPr>
-              <a:t>prirodno</a:t>
-            </a:r>
-            <a:r>
-              <a:rPr sz="1200" dirty="0">
-                <a:solidFill>
-                  <a:srgbClr val="E5EBF5"/>
-                </a:solidFill>
-                <a:latin typeface="Arial" panose="020B0604020202020204" pitchFamily="34" charset="0"/>
-                <a:cs typeface="Arial" panose="020B0604020202020204" pitchFamily="34" charset="0"/>
-              </a:rPr>
-              <a:t> </a:t>
-            </a:r>
-            <a:r>
-              <a:rPr sz="1200" dirty="0" err="1">
-                <a:solidFill>
-                  <a:srgbClr val="E5EBF5"/>
-                </a:solidFill>
-                <a:latin typeface="Arial" panose="020B0604020202020204" pitchFamily="34" charset="0"/>
-                <a:cs typeface="Arial" panose="020B0604020202020204" pitchFamily="34" charset="0"/>
-              </a:rPr>
-              <a:t>opisane</a:t>
-            </a:r>
-            <a:r>
-              <a:rPr sz="1200" dirty="0">
-                <a:solidFill>
-                  <a:srgbClr val="E5EBF5"/>
-                </a:solidFill>
-                <a:latin typeface="Arial" panose="020B0604020202020204" pitchFamily="34" charset="0"/>
-                <a:cs typeface="Arial" panose="020B0604020202020204" pitchFamily="34" charset="0"/>
-              </a:rPr>
-              <a:t> </a:t>
-            </a:r>
-            <a:r>
-              <a:rPr sz="1200" dirty="0" err="1">
-                <a:solidFill>
-                  <a:srgbClr val="E5EBF5"/>
-                </a:solidFill>
-                <a:latin typeface="Arial" panose="020B0604020202020204" pitchFamily="34" charset="0"/>
-                <a:cs typeface="Arial" panose="020B0604020202020204" pitchFamily="34" charset="0"/>
-              </a:rPr>
-              <a:t>fazorima</a:t>
-            </a:r>
-            <a:r>
-              <a:rPr sz="1200" dirty="0">
-                <a:solidFill>
-                  <a:srgbClr val="E5EBF5"/>
-                </a:solidFill>
-                <a:latin typeface="Arial" panose="020B0604020202020204" pitchFamily="34" charset="0"/>
-                <a:cs typeface="Arial" panose="020B0604020202020204" pitchFamily="34" charset="0"/>
-              </a:rPr>
-              <a:t> </a:t>
-            </a:r>
-            <a:r>
-              <a:rPr sz="1200" dirty="0" err="1">
-                <a:solidFill>
-                  <a:srgbClr val="E5EBF5"/>
-                </a:solidFill>
-                <a:latin typeface="Arial" panose="020B0604020202020204" pitchFamily="34" charset="0"/>
-                <a:cs typeface="Arial" panose="020B0604020202020204" pitchFamily="34" charset="0"/>
-              </a:rPr>
-              <a:t>napona</a:t>
-            </a:r>
-            <a:r>
-              <a:rPr sz="1200" dirty="0">
-                <a:solidFill>
-                  <a:srgbClr val="E5EBF5"/>
-                </a:solidFill>
-                <a:latin typeface="Arial" panose="020B0604020202020204" pitchFamily="34" charset="0"/>
-                <a:cs typeface="Arial" panose="020B0604020202020204" pitchFamily="34" charset="0"/>
-              </a:rPr>
-              <a:t>.</a:t>
-            </a:r>
           </a:p>
           <a:p>
             <a:pPr>
@@ -9243,7 +9103,7 @@
           </a:prstGeom>
           <a:extLst>
             <a:ext uri="{C572A759-6A51-4108-AA02-DFA0A04FC94B}">
-              <ma14:wrappingTextBoxFlag xmlns:ma14="http://schemas.microsoft.com/office/mac/drawingml/2011/main" xmlns="" val="0"/>
+              <ma14:wrappingTextBoxFlag xmlns="" xmlns:ma14="http://schemas.microsoft.com/office/mac/drawingml/2011/main" val="0"/>
             </a:ext>
           </a:extLst>
         </p:spPr>
@@ -9820,7 +9680,7 @@
           </a:prstGeom>
           <a:extLst>
             <a:ext uri="{C572A759-6A51-4108-AA02-DFA0A04FC94B}">
-              <ma14:wrappingTextBoxFlag xmlns:ma14="http://schemas.microsoft.com/office/mac/drawingml/2011/main" xmlns="" val="0"/>
+              <ma14:wrappingTextBoxFlag xmlns="" xmlns:ma14="http://schemas.microsoft.com/office/mac/drawingml/2011/main" val="0"/>
             </a:ext>
           </a:extLst>
         </p:spPr>

--- a/presentation/Prezentacija.pptx
+++ b/presentation/Prezentacija.pptx
@@ -5,7 +5,7 @@
     <p:sldMasterId id="2147483648" r:id="rId1"/>
   </p:sldMasterIdLst>
   <p:notesMasterIdLst>
-    <p:notesMasterId r:id="rId14"/>
+    <p:notesMasterId r:id="rId13"/>
   </p:notesMasterIdLst>
   <p:sldIdLst>
     <p:sldId id="256" r:id="rId2"/>
@@ -14,12 +14,11 @@
     <p:sldId id="259" r:id="rId5"/>
     <p:sldId id="268" r:id="rId6"/>
     <p:sldId id="261" r:id="rId7"/>
-    <p:sldId id="262" r:id="rId8"/>
-    <p:sldId id="269" r:id="rId9"/>
-    <p:sldId id="270" r:id="rId10"/>
-    <p:sldId id="271" r:id="rId11"/>
-    <p:sldId id="272" r:id="rId12"/>
-    <p:sldId id="267" r:id="rId13"/>
+    <p:sldId id="269" r:id="rId8"/>
+    <p:sldId id="270" r:id="rId9"/>
+    <p:sldId id="271" r:id="rId10"/>
+    <p:sldId id="272" r:id="rId11"/>
+    <p:sldId id="267" r:id="rId12"/>
   </p:sldIdLst>
   <p:sldSz cx="12192000" cy="6858000"/>
   <p:notesSz cx="6858000" cy="12192000"/>
@@ -817,91 +816,7 @@
           <a:p>
             <a:fld id="{F7021451-1387-4CA6-816F-3879F97B5CBC}" type="slidenum">
               <a:rPr lang="en-US"/>
-              <a:t>7</a:t>
-            </a:fld>
-            <a:endParaRPr lang="en-US"/>
-          </a:p>
-        </p:txBody>
-      </p:sp>
-    </p:spTree>
-    <p:extLst>
-      <p:ext uri="{BB962C8B-B14F-4D97-AF65-F5344CB8AC3E}">
-        <p14:creationId xmlns:p14="http://schemas.microsoft.com/office/powerpoint/2010/main" val="1024086991"/>
-      </p:ext>
-    </p:extLst>
-  </p:cSld>
-  <p:clrMapOvr>
-    <a:masterClrMapping/>
-  </p:clrMapOvr>
-</p:notes>
-</file>
-
-<file path=ppt/notesSlides/notesSlide8.xml><?xml version="1.0" encoding="utf-8"?>
-<p:notes xmlns:a="http://schemas.openxmlformats.org/drawingml/2006/main" xmlns:r="http://schemas.openxmlformats.org/officeDocument/2006/relationships" xmlns:p="http://schemas.openxmlformats.org/presentationml/2006/main">
-  <p:cSld>
-    <p:spTree>
-      <p:nvGrpSpPr>
-        <p:cNvPr id="1" name=""/>
-        <p:cNvGrpSpPr/>
-        <p:nvPr/>
-      </p:nvGrpSpPr>
-      <p:grpSpPr>
-        <a:xfrm>
-          <a:off x="0" y="0"/>
-          <a:ext cx="0" cy="0"/>
-          <a:chOff x="0" y="0"/>
-          <a:chExt cx="0" cy="0"/>
-        </a:xfrm>
-      </p:grpSpPr>
-      <p:sp>
-        <p:nvSpPr>
-          <p:cNvPr id="2" name="Slide Image Placeholder 1"/>
-          <p:cNvSpPr>
-            <a:spLocks noGrp="1" noRot="1" noChangeAspect="1"/>
-          </p:cNvSpPr>
-          <p:nvPr>
-            <p:ph type="sldImg"/>
-          </p:nvPr>
-        </p:nvSpPr>
-        <p:spPr/>
-      </p:sp>
-      <p:sp>
-        <p:nvSpPr>
-          <p:cNvPr id="3" name="Notes Placeholder 2"/>
-          <p:cNvSpPr>
-            <a:spLocks noGrp="1"/>
-          </p:cNvSpPr>
-          <p:nvPr>
-            <p:ph type="body" idx="1"/>
-          </p:nvPr>
-        </p:nvSpPr>
-        <p:spPr/>
-        <p:txBody>
-          <a:bodyPr/>
-          <a:lstStyle/>
-          <a:p>
-            <a:endParaRPr lang="en-US" dirty="0"/>
-          </a:p>
-        </p:txBody>
-      </p:sp>
-      <p:sp>
-        <p:nvSpPr>
-          <p:cNvPr id="4" name="Slide Number Placeholder 3"/>
-          <p:cNvSpPr>
-            <a:spLocks noGrp="1"/>
-          </p:cNvSpPr>
-          <p:nvPr>
-            <p:ph type="sldNum" sz="quarter" idx="10"/>
-          </p:nvPr>
-        </p:nvSpPr>
-        <p:spPr/>
-        <p:txBody>
-          <a:bodyPr/>
-          <a:lstStyle/>
-          <a:p>
-            <a:fld id="{F7021451-1387-4CA6-816F-3879F97B5CBC}" type="slidenum">
-              <a:rPr lang="en-US"/>
-              <a:t>12</a:t>
+              <a:t>11</a:t>
             </a:fld>
             <a:endParaRPr lang="en-US"/>
           </a:p>
@@ -1748,7 +1663,7 @@
         <p:spPr>
           <a:xfrm>
             <a:off x="411480" y="228600"/>
-            <a:ext cx="4695516" cy="446276"/>
+            <a:ext cx="6186309" cy="446276"/>
           </a:xfrm>
           <a:prstGeom prst="rect">
             <a:avLst/>
@@ -1773,7 +1688,7 @@
                 <a:latin typeface="Arial" panose="020B0604020202020204" pitchFamily="34" charset="0"/>
                 <a:cs typeface="Arial" panose="020B0604020202020204" pitchFamily="34" charset="0"/>
               </a:rPr>
-              <a:t>Poređenje</a:t>
+              <a:t>Konvergencija</a:t>
             </a:r>
             <a:r>
               <a:rPr dirty="0">
@@ -1787,7 +1702,7 @@
                 <a:latin typeface="Arial" panose="020B0604020202020204" pitchFamily="34" charset="0"/>
                 <a:cs typeface="Arial" panose="020B0604020202020204" pitchFamily="34" charset="0"/>
               </a:rPr>
-              <a:t>uglova</a:t>
+              <a:t>i</a:t>
             </a:r>
             <a:r>
               <a:rPr dirty="0">
@@ -1801,21 +1716,21 @@
                 <a:latin typeface="Arial" panose="020B0604020202020204" pitchFamily="34" charset="0"/>
                 <a:cs typeface="Arial" panose="020B0604020202020204" pitchFamily="34" charset="0"/>
               </a:rPr>
-              <a:t>faznih</a:t>
+              <a:t>generisane</a:t>
             </a:r>
             <a:r>
               <a:rPr dirty="0">
                 <a:latin typeface="Arial" panose="020B0604020202020204" pitchFamily="34" charset="0"/>
                 <a:cs typeface="Arial" panose="020B0604020202020204" pitchFamily="34" charset="0"/>
               </a:rPr>
-              <a:t> </a:t>
+              <a:t> WLS </a:t>
             </a:r>
             <a:r>
               <a:rPr dirty="0" err="1">
                 <a:latin typeface="Arial" panose="020B0604020202020204" pitchFamily="34" charset="0"/>
                 <a:cs typeface="Arial" panose="020B0604020202020204" pitchFamily="34" charset="0"/>
               </a:rPr>
-              <a:t>napona</a:t>
+              <a:t>jednačine</a:t>
             </a:r>
             <a:endParaRPr dirty="0">
               <a:latin typeface="Arial" panose="020B0604020202020204" pitchFamily="34" charset="0"/>
@@ -1912,7 +1827,7 @@
         <p:spPr>
           <a:xfrm>
             <a:off x="502920" y="1234440"/>
-            <a:ext cx="11109960" cy="4434840"/>
+            <a:ext cx="5486400" cy="4069080"/>
           </a:xfrm>
           <a:prstGeom prst="roundRect">
             <a:avLst/>
@@ -1951,7 +1866,7 @@
       </p:sp>
       <p:pic>
         <p:nvPicPr>
-          <p:cNvPr id="7" name="Picture 6" descr="angle_large_crop.png"/>
+          <p:cNvPr id="7" name="Picture 6" descr="prec_large_crop.png"/>
           <p:cNvPicPr>
             <a:picLocks noChangeAspect="1"/>
           </p:cNvPicPr>
@@ -1965,8 +1880,8 @@
         </p:blipFill>
         <p:spPr>
           <a:xfrm>
-            <a:off x="1599840" y="1234440"/>
-            <a:ext cx="8916118" cy="4434840"/>
+            <a:off x="502920" y="1903095"/>
+            <a:ext cx="5486400" cy="2731770"/>
           </a:xfrm>
           <a:prstGeom prst="rect">
             <a:avLst/>
@@ -1981,18 +1896,18 @@
         </p:nvSpPr>
         <p:spPr>
           <a:xfrm>
-            <a:off x="777240" y="5788152"/>
-            <a:ext cx="3429000" cy="594360"/>
+            <a:off x="6217920" y="1234440"/>
+            <a:ext cx="5394960" cy="4069080"/>
           </a:xfrm>
           <a:prstGeom prst="roundRect">
             <a:avLst/>
           </a:prstGeom>
           <a:solidFill>
-            <a:srgbClr val="F5FAFD"/>
+            <a:srgbClr val="FFFFFF"/>
           </a:solidFill>
-          <a:ln w="8890">
+          <a:ln w="10160">
             <a:solidFill>
-              <a:srgbClr val="919191"/>
+              <a:srgbClr val="D2D2D2"/>
             </a:solidFill>
           </a:ln>
         </p:spPr>
@@ -2011,557 +1926,6 @@
           </a:fontRef>
         </p:style>
         <p:txBody>
-          <a:bodyPr lIns="118872" tIns="73152" rIns="118872" bIns="54864" rtlCol="0" anchor="ctr"/>
-          <a:lstStyle/>
-          <a:p>
-            <a:pPr algn="ctr">
-              <a:defRPr sz="1250" b="1">
-                <a:solidFill>
-                  <a:srgbClr val="1C1C1C"/>
-                </a:solidFill>
-              </a:defRPr>
-            </a:pPr>
-            <a:r>
-              <a:rPr dirty="0" err="1">
-                <a:latin typeface="Arial" panose="020B0604020202020204" pitchFamily="34" charset="0"/>
-                <a:cs typeface="Arial" panose="020B0604020202020204" pitchFamily="34" charset="0"/>
-              </a:rPr>
-              <a:t>Faza</a:t>
-            </a:r>
-            <a:r>
-              <a:rPr dirty="0">
-                <a:latin typeface="Arial" panose="020B0604020202020204" pitchFamily="34" charset="0"/>
-                <a:cs typeface="Arial" panose="020B0604020202020204" pitchFamily="34" charset="0"/>
-              </a:rPr>
-              <a:t> A</a:t>
-            </a:r>
-          </a:p>
-          <a:p>
-            <a:pPr>
-              <a:spcBef>
-                <a:spcPts val="400"/>
-              </a:spcBef>
-              <a:defRPr sz="1019">
-                <a:solidFill>
-                  <a:srgbClr val="1C1C1C"/>
-                </a:solidFill>
-              </a:defRPr>
-            </a:pPr>
-            <a:r>
-              <a:rPr dirty="0" err="1">
-                <a:latin typeface="Arial" panose="020B0604020202020204" pitchFamily="34" charset="0"/>
-                <a:cs typeface="Arial" panose="020B0604020202020204" pitchFamily="34" charset="0"/>
-              </a:rPr>
-              <a:t>ugao</a:t>
-            </a:r>
-            <a:r>
-              <a:rPr dirty="0">
-                <a:latin typeface="Arial" panose="020B0604020202020204" pitchFamily="34" charset="0"/>
-                <a:cs typeface="Arial" panose="020B0604020202020204" pitchFamily="34" charset="0"/>
-              </a:rPr>
-              <a:t> </a:t>
-            </a:r>
-            <a:r>
-              <a:rPr dirty="0" err="1">
-                <a:latin typeface="Arial" panose="020B0604020202020204" pitchFamily="34" charset="0"/>
-                <a:cs typeface="Arial" panose="020B0604020202020204" pitchFamily="34" charset="0"/>
-              </a:rPr>
-              <a:t>blizu</a:t>
-            </a:r>
-            <a:r>
-              <a:rPr dirty="0">
-                <a:latin typeface="Arial" panose="020B0604020202020204" pitchFamily="34" charset="0"/>
-                <a:cs typeface="Arial" panose="020B0604020202020204" pitchFamily="34" charset="0"/>
-              </a:rPr>
-              <a:t> 0 rad</a:t>
-            </a:r>
-          </a:p>
-        </p:txBody>
-      </p:sp>
-      <p:sp>
-        <p:nvSpPr>
-          <p:cNvPr id="9" name="Rounded Rectangle 8"/>
-          <p:cNvSpPr/>
-          <p:nvPr/>
-        </p:nvSpPr>
-        <p:spPr>
-          <a:xfrm>
-            <a:off x="4434840" y="5788152"/>
-            <a:ext cx="3429000" cy="594360"/>
-          </a:xfrm>
-          <a:prstGeom prst="roundRect">
-            <a:avLst/>
-          </a:prstGeom>
-          <a:solidFill>
-            <a:srgbClr val="F5FAFD"/>
-          </a:solidFill>
-          <a:ln w="8890">
-            <a:solidFill>
-              <a:srgbClr val="919191"/>
-            </a:solidFill>
-          </a:ln>
-        </p:spPr>
-        <p:style>
-          <a:lnRef idx="1">
-            <a:schemeClr val="accent1"/>
-          </a:lnRef>
-          <a:fillRef idx="3">
-            <a:schemeClr val="accent1"/>
-          </a:fillRef>
-          <a:effectRef idx="2">
-            <a:schemeClr val="accent1"/>
-          </a:effectRef>
-          <a:fontRef idx="minor">
-            <a:schemeClr val="lt1"/>
-          </a:fontRef>
-        </p:style>
-        <p:txBody>
-          <a:bodyPr lIns="118872" tIns="73152" rIns="118872" bIns="54864" rtlCol="0" anchor="ctr"/>
-          <a:lstStyle/>
-          <a:p>
-            <a:pPr algn="ctr">
-              <a:defRPr sz="1250" b="1">
-                <a:solidFill>
-                  <a:srgbClr val="1C1C1C"/>
-                </a:solidFill>
-              </a:defRPr>
-            </a:pPr>
-            <a:r>
-              <a:rPr dirty="0" err="1">
-                <a:latin typeface="Arial" panose="020B0604020202020204" pitchFamily="34" charset="0"/>
-                <a:cs typeface="Arial" panose="020B0604020202020204" pitchFamily="34" charset="0"/>
-              </a:rPr>
-              <a:t>Faza</a:t>
-            </a:r>
-            <a:r>
-              <a:rPr dirty="0">
-                <a:latin typeface="Arial" panose="020B0604020202020204" pitchFamily="34" charset="0"/>
-                <a:cs typeface="Arial" panose="020B0604020202020204" pitchFamily="34" charset="0"/>
-              </a:rPr>
-              <a:t> B</a:t>
-            </a:r>
-          </a:p>
-          <a:p>
-            <a:pPr>
-              <a:spcBef>
-                <a:spcPts val="400"/>
-              </a:spcBef>
-              <a:defRPr sz="1019">
-                <a:solidFill>
-                  <a:srgbClr val="1C1C1C"/>
-                </a:solidFill>
-              </a:defRPr>
-            </a:pPr>
-            <a:r>
-              <a:rPr dirty="0" err="1">
-                <a:latin typeface="Arial" panose="020B0604020202020204" pitchFamily="34" charset="0"/>
-                <a:cs typeface="Arial" panose="020B0604020202020204" pitchFamily="34" charset="0"/>
-              </a:rPr>
-              <a:t>oko</a:t>
-            </a:r>
-            <a:r>
-              <a:rPr dirty="0">
-                <a:latin typeface="Arial" panose="020B0604020202020204" pitchFamily="34" charset="0"/>
-                <a:cs typeface="Arial" panose="020B0604020202020204" pitchFamily="34" charset="0"/>
-              </a:rPr>
-              <a:t> −2.094 rad</a:t>
-            </a:r>
-          </a:p>
-        </p:txBody>
-      </p:sp>
-      <p:sp>
-        <p:nvSpPr>
-          <p:cNvPr id="10" name="Rounded Rectangle 9"/>
-          <p:cNvSpPr/>
-          <p:nvPr/>
-        </p:nvSpPr>
-        <p:spPr>
-          <a:xfrm>
-            <a:off x="8092440" y="5788152"/>
-            <a:ext cx="3429000" cy="594360"/>
-          </a:xfrm>
-          <a:prstGeom prst="roundRect">
-            <a:avLst/>
-          </a:prstGeom>
-          <a:solidFill>
-            <a:srgbClr val="F5FAFD"/>
-          </a:solidFill>
-          <a:ln w="8890">
-            <a:solidFill>
-              <a:srgbClr val="919191"/>
-            </a:solidFill>
-          </a:ln>
-        </p:spPr>
-        <p:style>
-          <a:lnRef idx="1">
-            <a:schemeClr val="accent1"/>
-          </a:lnRef>
-          <a:fillRef idx="3">
-            <a:schemeClr val="accent1"/>
-          </a:fillRef>
-          <a:effectRef idx="2">
-            <a:schemeClr val="accent1"/>
-          </a:effectRef>
-          <a:fontRef idx="minor">
-            <a:schemeClr val="lt1"/>
-          </a:fontRef>
-        </p:style>
-        <p:txBody>
-          <a:bodyPr lIns="118872" tIns="73152" rIns="118872" bIns="54864" rtlCol="0" anchor="ctr"/>
-          <a:lstStyle/>
-          <a:p>
-            <a:pPr algn="ctr">
-              <a:defRPr sz="1250" b="1">
-                <a:solidFill>
-                  <a:srgbClr val="1C1C1C"/>
-                </a:solidFill>
-              </a:defRPr>
-            </a:pPr>
-            <a:r>
-              <a:rPr dirty="0" err="1">
-                <a:latin typeface="Arial" panose="020B0604020202020204" pitchFamily="34" charset="0"/>
-                <a:cs typeface="Arial" panose="020B0604020202020204" pitchFamily="34" charset="0"/>
-              </a:rPr>
-              <a:t>Faza</a:t>
-            </a:r>
-            <a:r>
-              <a:rPr dirty="0">
-                <a:latin typeface="Arial" panose="020B0604020202020204" pitchFamily="34" charset="0"/>
-                <a:cs typeface="Arial" panose="020B0604020202020204" pitchFamily="34" charset="0"/>
-              </a:rPr>
-              <a:t> C</a:t>
-            </a:r>
-          </a:p>
-          <a:p>
-            <a:pPr>
-              <a:spcBef>
-                <a:spcPts val="400"/>
-              </a:spcBef>
-              <a:defRPr sz="1019">
-                <a:solidFill>
-                  <a:srgbClr val="1C1C1C"/>
-                </a:solidFill>
-              </a:defRPr>
-            </a:pPr>
-            <a:r>
-              <a:rPr dirty="0" err="1">
-                <a:latin typeface="Arial" panose="020B0604020202020204" pitchFamily="34" charset="0"/>
-                <a:cs typeface="Arial" panose="020B0604020202020204" pitchFamily="34" charset="0"/>
-              </a:rPr>
-              <a:t>oko</a:t>
-            </a:r>
-            <a:r>
-              <a:rPr dirty="0">
-                <a:latin typeface="Arial" panose="020B0604020202020204" pitchFamily="34" charset="0"/>
-                <a:cs typeface="Arial" panose="020B0604020202020204" pitchFamily="34" charset="0"/>
-              </a:rPr>
-              <a:t> +2.094 rad</a:t>
-            </a:r>
-          </a:p>
-        </p:txBody>
-      </p:sp>
-    </p:spTree>
-    <p:extLst>
-      <p:ext uri="{BB962C8B-B14F-4D97-AF65-F5344CB8AC3E}">
-        <p14:creationId xmlns:p14="http://schemas.microsoft.com/office/powerpoint/2010/main" val="3141492818"/>
-      </p:ext>
-    </p:extLst>
-  </p:cSld>
-  <p:clrMapOvr>
-    <a:masterClrMapping/>
-  </p:clrMapOvr>
-</p:sld>
-</file>
-
-<file path=ppt/slides/slide11.xml><?xml version="1.0" encoding="utf-8"?>
-<p:sld xmlns:a="http://schemas.openxmlformats.org/drawingml/2006/main" xmlns:r="http://schemas.openxmlformats.org/officeDocument/2006/relationships" xmlns:p="http://schemas.openxmlformats.org/presentationml/2006/main">
-  <p:cSld>
-    <p:spTree>
-      <p:nvGrpSpPr>
-        <p:cNvPr id="1" name=""/>
-        <p:cNvGrpSpPr/>
-        <p:nvPr/>
-      </p:nvGrpSpPr>
-      <p:grpSpPr>
-        <a:xfrm>
-          <a:off x="0" y="0"/>
-          <a:ext cx="0" cy="0"/>
-          <a:chOff x="0" y="0"/>
-          <a:chExt cx="0" cy="0"/>
-        </a:xfrm>
-      </p:grpSpPr>
-      <p:sp>
-        <p:nvSpPr>
-          <p:cNvPr id="2" name="TextBox 1"/>
-          <p:cNvSpPr txBox="1"/>
-          <p:nvPr/>
-        </p:nvSpPr>
-        <p:spPr>
-          <a:xfrm>
-            <a:off x="411480" y="228600"/>
-            <a:ext cx="6186309" cy="446276"/>
-          </a:xfrm>
-          <a:prstGeom prst="rect">
-            <a:avLst/>
-          </a:prstGeom>
-          <a:noFill/>
-        </p:spPr>
-        <p:txBody>
-          <a:bodyPr wrap="none">
-            <a:spAutoFit/>
-          </a:bodyPr>
-          <a:lstStyle/>
-          <a:p>
-            <a:pPr>
-              <a:defRPr sz="2300" b="1">
-                <a:solidFill>
-                  <a:srgbClr val="1C1C1C"/>
-                </a:solidFill>
-              </a:defRPr>
-            </a:pPr>
-            <a:r>
-              <a:rPr dirty="0" err="1">
-                <a:latin typeface="Arial" panose="020B0604020202020204" pitchFamily="34" charset="0"/>
-                <a:cs typeface="Arial" panose="020B0604020202020204" pitchFamily="34" charset="0"/>
-              </a:rPr>
-              <a:t>Konvergencija</a:t>
-            </a:r>
-            <a:r>
-              <a:rPr dirty="0">
-                <a:latin typeface="Arial" panose="020B0604020202020204" pitchFamily="34" charset="0"/>
-                <a:cs typeface="Arial" panose="020B0604020202020204" pitchFamily="34" charset="0"/>
-              </a:rPr>
-              <a:t> </a:t>
-            </a:r>
-            <a:r>
-              <a:rPr dirty="0" err="1">
-                <a:latin typeface="Arial" panose="020B0604020202020204" pitchFamily="34" charset="0"/>
-                <a:cs typeface="Arial" panose="020B0604020202020204" pitchFamily="34" charset="0"/>
-              </a:rPr>
-              <a:t>i</a:t>
-            </a:r>
-            <a:r>
-              <a:rPr dirty="0">
-                <a:latin typeface="Arial" panose="020B0604020202020204" pitchFamily="34" charset="0"/>
-                <a:cs typeface="Arial" panose="020B0604020202020204" pitchFamily="34" charset="0"/>
-              </a:rPr>
-              <a:t> </a:t>
-            </a:r>
-            <a:r>
-              <a:rPr dirty="0" err="1">
-                <a:latin typeface="Arial" panose="020B0604020202020204" pitchFamily="34" charset="0"/>
-                <a:cs typeface="Arial" panose="020B0604020202020204" pitchFamily="34" charset="0"/>
-              </a:rPr>
-              <a:t>generisane</a:t>
-            </a:r>
-            <a:r>
-              <a:rPr dirty="0">
-                <a:latin typeface="Arial" panose="020B0604020202020204" pitchFamily="34" charset="0"/>
-                <a:cs typeface="Arial" panose="020B0604020202020204" pitchFamily="34" charset="0"/>
-              </a:rPr>
-              <a:t> WLS </a:t>
-            </a:r>
-            <a:r>
-              <a:rPr dirty="0" err="1">
-                <a:latin typeface="Arial" panose="020B0604020202020204" pitchFamily="34" charset="0"/>
-                <a:cs typeface="Arial" panose="020B0604020202020204" pitchFamily="34" charset="0"/>
-              </a:rPr>
-              <a:t>jednačine</a:t>
-            </a:r>
-            <a:endParaRPr dirty="0">
-              <a:latin typeface="Arial" panose="020B0604020202020204" pitchFamily="34" charset="0"/>
-              <a:cs typeface="Arial" panose="020B0604020202020204" pitchFamily="34" charset="0"/>
-            </a:endParaRPr>
-          </a:p>
-        </p:txBody>
-      </p:sp>
-      <p:sp>
-        <p:nvSpPr>
-          <p:cNvPr id="4" name="Rectangle 3"/>
-          <p:cNvSpPr/>
-          <p:nvPr/>
-        </p:nvSpPr>
-        <p:spPr>
-          <a:xfrm>
-            <a:off x="411480" y="987552"/>
-            <a:ext cx="11384280" cy="27432"/>
-          </a:xfrm>
-          <a:prstGeom prst="rect">
-            <a:avLst/>
-          </a:prstGeom>
-          <a:solidFill>
-            <a:srgbClr val="1E6BB1"/>
-          </a:solidFill>
-          <a:ln>
-            <a:noFill/>
-          </a:ln>
-        </p:spPr>
-        <p:style>
-          <a:lnRef idx="1">
-            <a:schemeClr val="accent1"/>
-          </a:lnRef>
-          <a:fillRef idx="3">
-            <a:schemeClr val="accent1"/>
-          </a:fillRef>
-          <a:effectRef idx="2">
-            <a:schemeClr val="accent1"/>
-          </a:effectRef>
-          <a:fontRef idx="minor">
-            <a:schemeClr val="lt1"/>
-          </a:fontRef>
-        </p:style>
-        <p:txBody>
-          <a:bodyPr rtlCol="0" anchor="ctr"/>
-          <a:lstStyle/>
-          <a:p>
-            <a:pPr algn="ctr"/>
-            <a:endParaRPr/>
-          </a:p>
-        </p:txBody>
-      </p:sp>
-      <p:sp>
-        <p:nvSpPr>
-          <p:cNvPr id="5" name="TextBox 4"/>
-          <p:cNvSpPr txBox="1"/>
-          <p:nvPr/>
-        </p:nvSpPr>
-        <p:spPr>
-          <a:xfrm>
-            <a:off x="10698480" y="6547104"/>
-            <a:ext cx="914400" cy="201168"/>
-          </a:xfrm>
-          <a:prstGeom prst="rect">
-            <a:avLst/>
-          </a:prstGeom>
-          <a:noFill/>
-        </p:spPr>
-        <p:txBody>
-          <a:bodyPr wrap="none">
-            <a:spAutoFit/>
-          </a:bodyPr>
-          <a:lstStyle/>
-          <a:p>
-            <a:pPr>
-              <a:defRPr sz="850">
-                <a:solidFill>
-                  <a:srgbClr val="555555"/>
-                </a:solidFill>
-              </a:defRPr>
-            </a:pPr>
-            <a:r>
-              <a:t>SREES</a:t>
-            </a:r>
-          </a:p>
-        </p:txBody>
-      </p:sp>
-      <p:sp>
-        <p:nvSpPr>
-          <p:cNvPr id="6" name="Rounded Rectangle 5"/>
-          <p:cNvSpPr/>
-          <p:nvPr/>
-        </p:nvSpPr>
-        <p:spPr>
-          <a:xfrm>
-            <a:off x="502920" y="1234440"/>
-            <a:ext cx="5486400" cy="4069080"/>
-          </a:xfrm>
-          <a:prstGeom prst="roundRect">
-            <a:avLst/>
-          </a:prstGeom>
-          <a:solidFill>
-            <a:srgbClr val="FFFFFF"/>
-          </a:solidFill>
-          <a:ln w="10160">
-            <a:solidFill>
-              <a:srgbClr val="D2D2D2"/>
-            </a:solidFill>
-          </a:ln>
-        </p:spPr>
-        <p:style>
-          <a:lnRef idx="1">
-            <a:schemeClr val="accent1"/>
-          </a:lnRef>
-          <a:fillRef idx="3">
-            <a:schemeClr val="accent1"/>
-          </a:fillRef>
-          <a:effectRef idx="2">
-            <a:schemeClr val="accent1"/>
-          </a:effectRef>
-          <a:fontRef idx="minor">
-            <a:schemeClr val="lt1"/>
-          </a:fontRef>
-        </p:style>
-        <p:txBody>
-          <a:bodyPr rtlCol="0" anchor="ctr"/>
-          <a:lstStyle/>
-          <a:p>
-            <a:pPr algn="ctr"/>
-            <a:endParaRPr/>
-          </a:p>
-        </p:txBody>
-      </p:sp>
-      <p:pic>
-        <p:nvPicPr>
-          <p:cNvPr id="7" name="Picture 6" descr="prec_large_crop.png"/>
-          <p:cNvPicPr>
-            <a:picLocks noChangeAspect="1"/>
-          </p:cNvPicPr>
-          <p:nvPr/>
-        </p:nvPicPr>
-        <p:blipFill>
-          <a:blip r:embed="rId2"/>
-          <a:stretch>
-            <a:fillRect/>
-          </a:stretch>
-        </p:blipFill>
-        <p:spPr>
-          <a:xfrm>
-            <a:off x="502920" y="1903095"/>
-            <a:ext cx="5486400" cy="2731770"/>
-          </a:xfrm>
-          <a:prstGeom prst="rect">
-            <a:avLst/>
-          </a:prstGeom>
-        </p:spPr>
-      </p:pic>
-      <p:sp>
-        <p:nvSpPr>
-          <p:cNvPr id="8" name="Rounded Rectangle 7"/>
-          <p:cNvSpPr/>
-          <p:nvPr/>
-        </p:nvSpPr>
-        <p:spPr>
-          <a:xfrm>
-            <a:off x="6217920" y="1234440"/>
-            <a:ext cx="5394960" cy="4069080"/>
-          </a:xfrm>
-          <a:prstGeom prst="roundRect">
-            <a:avLst/>
-          </a:prstGeom>
-          <a:solidFill>
-            <a:srgbClr val="FFFFFF"/>
-          </a:solidFill>
-          <a:ln w="10160">
-            <a:solidFill>
-              <a:srgbClr val="D2D2D2"/>
-            </a:solidFill>
-          </a:ln>
-        </p:spPr>
-        <p:style>
-          <a:lnRef idx="1">
-            <a:schemeClr val="accent1"/>
-          </a:lnRef>
-          <a:fillRef idx="3">
-            <a:schemeClr val="accent1"/>
-          </a:fillRef>
-          <a:effectRef idx="2">
-            <a:schemeClr val="accent1"/>
-          </a:effectRef>
-          <a:fontRef idx="minor">
-            <a:schemeClr val="lt1"/>
-          </a:fontRef>
-        </p:style>
-        <p:txBody>
           <a:bodyPr rtlCol="0" anchor="ctr"/>
           <a:lstStyle/>
           <a:p>
@@ -2811,7 +2175,7 @@
 </p:sld>
 </file>
 
-<file path=ppt/slides/slide12.xml><?xml version="1.0" encoding="utf-8"?>
+<file path=ppt/slides/slide11.xml><?xml version="1.0" encoding="utf-8"?>
 <p:sld xmlns:a="http://schemas.openxmlformats.org/drawingml/2006/main" xmlns:r="http://schemas.openxmlformats.org/officeDocument/2006/relationships" xmlns:p="http://schemas.openxmlformats.org/presentationml/2006/main">
   <p:cSld name="Slide 12">
     <p:spTree>
@@ -3151,7 +2515,7 @@
             <a:pPr algn="r"/>
             <a:fld id="{F7021451-1387-4CA6-816F-3879F97B5CBC}" type="slidenum">
               <a:rPr lang="en-US" b="0"/>
-              <a:t>12</a:t>
+              <a:t>11</a:t>
             </a:fld>
             <a:endParaRPr lang="en-US"/>
           </a:p>
@@ -9398,496 +8762,6 @@
 
 <file path=ppt/slides/slide7.xml><?xml version="1.0" encoding="utf-8"?>
 <p:sld xmlns:a="http://schemas.openxmlformats.org/drawingml/2006/main" xmlns:r="http://schemas.openxmlformats.org/officeDocument/2006/relationships" xmlns:p="http://schemas.openxmlformats.org/presentationml/2006/main">
-  <p:cSld name="Slide 7">
-    <p:spTree>
-      <p:nvGrpSpPr>
-        <p:cNvPr id="1" name=""/>
-        <p:cNvGrpSpPr/>
-        <p:nvPr/>
-      </p:nvGrpSpPr>
-      <p:grpSpPr>
-        <a:xfrm>
-          <a:off x="0" y="0"/>
-          <a:ext cx="0" cy="0"/>
-          <a:chOff x="0" y="0"/>
-          <a:chExt cx="0" cy="0"/>
-        </a:xfrm>
-      </p:grpSpPr>
-      <p:sp>
-        <p:nvSpPr>
-          <p:cNvPr id="2" name="Text 0"/>
-          <p:cNvSpPr/>
-          <p:nvPr/>
-        </p:nvSpPr>
-        <p:spPr>
-          <a:xfrm>
-            <a:off x="502920" y="320040"/>
-            <a:ext cx="7498080" cy="347472"/>
-          </a:xfrm>
-          <a:prstGeom prst="rect">
-            <a:avLst/>
-          </a:prstGeom>
-          <a:noFill/>
-          <a:ln/>
-        </p:spPr>
-        <p:txBody>
-          <a:bodyPr wrap="square" lIns="0" tIns="0" rIns="0" bIns="0" rtlCol="0" anchor="ctr"/>
-          <a:lstStyle/>
-          <a:p>
-            <a:pPr marL="0" indent="0">
-              <a:buNone/>
-            </a:pPr>
-            <a:r>
-              <a:rPr lang="en-US" sz="2400" b="1" dirty="0">
-                <a:solidFill>
-                  <a:srgbClr val="102A43"/>
-                </a:solidFill>
-                <a:latin typeface="Arial" panose="020B0604020202020204" pitchFamily="34" charset="0"/>
-                <a:ea typeface="Aptos Display" pitchFamily="34" charset="-122"/>
-                <a:cs typeface="Arial" panose="020B0604020202020204" pitchFamily="34" charset="0"/>
-              </a:rPr>
-              <a:t>Simulirana mjerenja i Gaussov šum</a:t>
-            </a:r>
-            <a:endParaRPr lang="en-US" sz="2400" dirty="0">
-              <a:latin typeface="Arial" panose="020B0604020202020204" pitchFamily="34" charset="0"/>
-              <a:cs typeface="Arial" panose="020B0604020202020204" pitchFamily="34" charset="0"/>
-            </a:endParaRPr>
-          </a:p>
-        </p:txBody>
-      </p:sp>
-      <p:sp>
-        <p:nvSpPr>
-          <p:cNvPr id="3" name="Text 1"/>
-          <p:cNvSpPr/>
-          <p:nvPr/>
-        </p:nvSpPr>
-        <p:spPr>
-          <a:xfrm>
-            <a:off x="530352" y="713232"/>
-            <a:ext cx="7132320" cy="210312"/>
-          </a:xfrm>
-          <a:prstGeom prst="rect">
-            <a:avLst/>
-          </a:prstGeom>
-          <a:noFill/>
-          <a:ln/>
-        </p:spPr>
-        <p:txBody>
-          <a:bodyPr wrap="square" lIns="0" tIns="0" rIns="0" bIns="0" rtlCol="0" anchor="ctr"/>
-          <a:lstStyle/>
-          <a:p>
-            <a:pPr marL="0" indent="0">
-              <a:buNone/>
-            </a:pPr>
-            <a:r>
-              <a:rPr lang="en-US" sz="950" dirty="0">
-                <a:solidFill>
-                  <a:srgbClr val="64748B"/>
-                </a:solidFill>
-                <a:latin typeface="Arial" panose="020B0604020202020204" pitchFamily="34" charset="0"/>
-                <a:cs typeface="Arial" panose="020B0604020202020204" pitchFamily="34" charset="0"/>
-              </a:rPr>
-              <a:t>Provjera robusnosti bez ručnog unošenja rezultata</a:t>
-            </a:r>
-            <a:endParaRPr lang="en-US" sz="950" dirty="0">
-              <a:latin typeface="Arial" panose="020B0604020202020204" pitchFamily="34" charset="0"/>
-              <a:cs typeface="Arial" panose="020B0604020202020204" pitchFamily="34" charset="0"/>
-            </a:endParaRPr>
-          </a:p>
-        </p:txBody>
-      </p:sp>
-      <p:sp>
-        <p:nvSpPr>
-          <p:cNvPr id="6" name="Text 4"/>
-          <p:cNvSpPr/>
-          <p:nvPr/>
-        </p:nvSpPr>
-        <p:spPr>
-          <a:xfrm>
-            <a:off x="1143000" y="1938528"/>
-            <a:ext cx="146304" cy="91440"/>
-          </a:xfrm>
-          <a:prstGeom prst="rect">
-            <a:avLst/>
-          </a:prstGeom>
-          <a:noFill/>
-          <a:ln/>
-        </p:spPr>
-        <p:txBody>
-          <a:bodyPr wrap="square" lIns="381" tIns="381" rIns="381" bIns="381" rtlCol="0" anchor="ctr">
-            <a:normAutofit fontScale="77500" lnSpcReduction="20000"/>
-          </a:bodyPr>
-          <a:lstStyle/>
-          <a:p>
-            <a:pPr marL="0" indent="0" algn="ctr">
-              <a:buNone/>
-            </a:pPr>
-            <a:r>
-              <a:rPr lang="en-US" sz="900" b="1" dirty="0">
-                <a:solidFill>
-                  <a:srgbClr val="FFFFFF"/>
-                </a:solidFill>
-                <a:latin typeface="Aptos" pitchFamily="34" charset="0"/>
-                <a:ea typeface="Aptos" pitchFamily="34" charset="-122"/>
-                <a:cs typeface="Aptos" pitchFamily="34" charset="-120"/>
-              </a:rPr>
-              <a:t>1</a:t>
-            </a:r>
-            <a:endParaRPr lang="en-US" sz="900" dirty="0"/>
-          </a:p>
-        </p:txBody>
-      </p:sp>
-      <p:sp>
-        <p:nvSpPr>
-          <p:cNvPr id="11" name="Text 9"/>
-          <p:cNvSpPr/>
-          <p:nvPr/>
-        </p:nvSpPr>
-        <p:spPr>
-          <a:xfrm>
-            <a:off x="3931920" y="1938528"/>
-            <a:ext cx="146304" cy="91440"/>
-          </a:xfrm>
-          <a:prstGeom prst="rect">
-            <a:avLst/>
-          </a:prstGeom>
-          <a:noFill/>
-          <a:ln/>
-        </p:spPr>
-        <p:txBody>
-          <a:bodyPr wrap="square" lIns="381" tIns="381" rIns="381" bIns="381" rtlCol="0" anchor="ctr">
-            <a:normAutofit fontScale="77500" lnSpcReduction="20000"/>
-          </a:bodyPr>
-          <a:lstStyle/>
-          <a:p>
-            <a:pPr marL="0" indent="0" algn="ctr">
-              <a:buNone/>
-            </a:pPr>
-            <a:r>
-              <a:rPr lang="en-US" sz="900" b="1" dirty="0">
-                <a:solidFill>
-                  <a:srgbClr val="FFFFFF"/>
-                </a:solidFill>
-                <a:latin typeface="Aptos" pitchFamily="34" charset="0"/>
-                <a:ea typeface="Aptos" pitchFamily="34" charset="-122"/>
-                <a:cs typeface="Aptos" pitchFamily="34" charset="-120"/>
-              </a:rPr>
-              <a:t>2</a:t>
-            </a:r>
-            <a:endParaRPr lang="en-US" sz="900" dirty="0"/>
-          </a:p>
-        </p:txBody>
-      </p:sp>
-      <p:sp>
-        <p:nvSpPr>
-          <p:cNvPr id="16" name="Text 14"/>
-          <p:cNvSpPr/>
-          <p:nvPr/>
-        </p:nvSpPr>
-        <p:spPr>
-          <a:xfrm>
-            <a:off x="6720840" y="1938528"/>
-            <a:ext cx="146304" cy="91440"/>
-          </a:xfrm>
-          <a:prstGeom prst="rect">
-            <a:avLst/>
-          </a:prstGeom>
-          <a:noFill/>
-          <a:ln/>
-        </p:spPr>
-        <p:txBody>
-          <a:bodyPr wrap="square" lIns="381" tIns="381" rIns="381" bIns="381" rtlCol="0" anchor="ctr">
-            <a:normAutofit fontScale="77500" lnSpcReduction="20000"/>
-          </a:bodyPr>
-          <a:lstStyle/>
-          <a:p>
-            <a:pPr marL="0" indent="0" algn="ctr">
-              <a:buNone/>
-            </a:pPr>
-            <a:r>
-              <a:rPr lang="en-US" sz="900" b="1" dirty="0">
-                <a:solidFill>
-                  <a:srgbClr val="FFFFFF"/>
-                </a:solidFill>
-                <a:latin typeface="Aptos" pitchFamily="34" charset="0"/>
-                <a:ea typeface="Aptos" pitchFamily="34" charset="-122"/>
-                <a:cs typeface="Aptos" pitchFamily="34" charset="-120"/>
-              </a:rPr>
-              <a:t>3</a:t>
-            </a:r>
-            <a:endParaRPr lang="en-US" sz="900" dirty="0"/>
-          </a:p>
-        </p:txBody>
-      </p:sp>
-      <p:sp>
-        <p:nvSpPr>
-          <p:cNvPr id="21" name="Text 19"/>
-          <p:cNvSpPr/>
-          <p:nvPr/>
-        </p:nvSpPr>
-        <p:spPr>
-          <a:xfrm>
-            <a:off x="9509760" y="1938528"/>
-            <a:ext cx="146304" cy="91440"/>
-          </a:xfrm>
-          <a:prstGeom prst="rect">
-            <a:avLst/>
-          </a:prstGeom>
-          <a:noFill/>
-          <a:ln/>
-        </p:spPr>
-        <p:txBody>
-          <a:bodyPr wrap="square" lIns="381" tIns="381" rIns="381" bIns="381" rtlCol="0" anchor="ctr">
-            <a:normAutofit fontScale="77500" lnSpcReduction="20000"/>
-          </a:bodyPr>
-          <a:lstStyle/>
-          <a:p>
-            <a:pPr marL="0" indent="0" algn="ctr">
-              <a:buNone/>
-            </a:pPr>
-            <a:r>
-              <a:rPr lang="en-US" sz="900" b="1" dirty="0">
-                <a:solidFill>
-                  <a:srgbClr val="FFFFFF"/>
-                </a:solidFill>
-                <a:latin typeface="Aptos" pitchFamily="34" charset="0"/>
-                <a:ea typeface="Aptos" pitchFamily="34" charset="-122"/>
-                <a:cs typeface="Aptos" pitchFamily="34" charset="-120"/>
-              </a:rPr>
-              <a:t>4</a:t>
-            </a:r>
-            <a:endParaRPr lang="en-US" sz="900" dirty="0"/>
-          </a:p>
-        </p:txBody>
-      </p:sp>
-      <p:sp>
-        <p:nvSpPr>
-          <p:cNvPr id="26" name="Slide Number Placeholder 0"/>
-          <p:cNvSpPr>
-            <a:spLocks noGrp="1"/>
-          </p:cNvSpPr>
-          <p:nvPr>
-            <p:ph type="sldNum" sz="quarter" idx="4294967295"/>
-          </p:nvPr>
-        </p:nvSpPr>
-        <p:spPr>
-          <a:xfrm>
-            <a:off x="11292840" y="6565392"/>
-            <a:ext cx="800000" cy="300000"/>
-          </a:xfrm>
-          <a:prstGeom prst="rect">
-            <a:avLst/>
-          </a:prstGeom>
-          <a:extLst>
-            <a:ext uri="{C572A759-6A51-4108-AA02-DFA0A04FC94B}">
-              <ma14:wrappingTextBoxFlag xmlns="" xmlns:ma14="http://schemas.microsoft.com/office/mac/drawingml/2011/main" val="0"/>
-            </a:ext>
-          </a:extLst>
-        </p:spPr>
-        <p:txBody>
-          <a:bodyPr/>
-          <a:lstStyle>
-            <a:lvl1pPr>
-              <a:defRPr sz="750">
-                <a:solidFill>
-                  <a:srgbClr val="75808E"/>
-                </a:solidFill>
-                <a:latin typeface="Aptos"/>
-                <a:ea typeface="Aptos"/>
-                <a:cs typeface="Aptos"/>
-              </a:defRPr>
-            </a:lvl1pPr>
-          </a:lstStyle>
-          <a:p>
-            <a:pPr algn="r"/>
-            <a:fld id="{F7021451-1387-4CA6-816F-3879F97B5CBC}" type="slidenum">
-              <a:rPr lang="en-US" b="0"/>
-              <a:t>7</a:t>
-            </a:fld>
-            <a:endParaRPr lang="en-US"/>
-          </a:p>
-        </p:txBody>
-      </p:sp>
-      <p:pic>
-        <p:nvPicPr>
-          <p:cNvPr id="27" name="Picture 26"/>
-          <p:cNvPicPr>
-            <a:picLocks noChangeAspect="1"/>
-          </p:cNvPicPr>
-          <p:nvPr/>
-        </p:nvPicPr>
-        <p:blipFill>
-          <a:blip r:embed="rId3">
-            <a:extLst>
-              <a:ext uri="{28A0092B-C50C-407E-A947-70E740481C1C}">
-                <a14:useLocalDpi xmlns:a14="http://schemas.microsoft.com/office/drawing/2010/main" val="0"/>
-              </a:ext>
-            </a:extLst>
-          </a:blip>
-          <a:stretch>
-            <a:fillRect/>
-          </a:stretch>
-        </p:blipFill>
-        <p:spPr>
-          <a:xfrm>
-            <a:off x="7326926" y="85274"/>
-            <a:ext cx="5139475" cy="6651086"/>
-          </a:xfrm>
-          <a:prstGeom prst="rect">
-            <a:avLst/>
-          </a:prstGeom>
-        </p:spPr>
-      </p:pic>
-      <p:pic>
-        <p:nvPicPr>
-          <p:cNvPr id="28" name="Picture 27"/>
-          <p:cNvPicPr>
-            <a:picLocks noChangeAspect="1"/>
-          </p:cNvPicPr>
-          <p:nvPr/>
-        </p:nvPicPr>
-        <p:blipFill>
-          <a:blip r:embed="rId4">
-            <a:extLst>
-              <a:ext uri="{28A0092B-C50C-407E-A947-70E740481C1C}">
-                <a14:useLocalDpi xmlns:a14="http://schemas.microsoft.com/office/drawing/2010/main" val="0"/>
-              </a:ext>
-            </a:extLst>
-          </a:blip>
-          <a:stretch>
-            <a:fillRect/>
-          </a:stretch>
-        </p:blipFill>
-        <p:spPr>
-          <a:xfrm>
-            <a:off x="665196" y="3347060"/>
-            <a:ext cx="6448667" cy="1946962"/>
-          </a:xfrm>
-          <a:prstGeom prst="rect">
-            <a:avLst/>
-          </a:prstGeom>
-        </p:spPr>
-      </p:pic>
-      <p:sp>
-        <p:nvSpPr>
-          <p:cNvPr id="30" name="TextBox 29"/>
-          <p:cNvSpPr txBox="1"/>
-          <p:nvPr/>
-        </p:nvSpPr>
-        <p:spPr>
-          <a:xfrm>
-            <a:off x="738230" y="1107258"/>
-            <a:ext cx="6375633" cy="1754326"/>
-          </a:xfrm>
-          <a:prstGeom prst="rect">
-            <a:avLst/>
-          </a:prstGeom>
-          <a:noFill/>
-        </p:spPr>
-        <p:txBody>
-          <a:bodyPr wrap="square" rtlCol="0">
-            <a:spAutoFit/>
-          </a:bodyPr>
-          <a:lstStyle/>
-          <a:p>
-            <a:r>
-              <a:rPr lang="bs-Latn-BA" dirty="0">
-                <a:latin typeface="Arial" panose="020B0604020202020204" pitchFamily="34" charset="0"/>
-                <a:cs typeface="Arial" panose="020B0604020202020204" pitchFamily="34" charset="0"/>
-              </a:rPr>
-              <a:t>Princip rada Gaussovog šuma</a:t>
-            </a:r>
-            <a:r>
-              <a:rPr lang="en-US" dirty="0">
-                <a:latin typeface="Arial" panose="020B0604020202020204" pitchFamily="34" charset="0"/>
-                <a:cs typeface="Arial" panose="020B0604020202020204" pitchFamily="34" charset="0"/>
-              </a:rPr>
-              <a:t>:</a:t>
-            </a:r>
-          </a:p>
-          <a:p>
-            <a:pPr marL="285750" indent="-285750">
-              <a:buFont typeface="Arial" panose="020B0604020202020204" pitchFamily="34" charset="0"/>
-              <a:buChar char="•"/>
-            </a:pPr>
-            <a:r>
-              <a:rPr lang="en-US" dirty="0">
-                <a:latin typeface="Arial" panose="020B0604020202020204" pitchFamily="34" charset="0"/>
-                <a:cs typeface="Arial" panose="020B0604020202020204" pitchFamily="34" charset="0"/>
-              </a:rPr>
-              <a:t>U </a:t>
-            </a:r>
-            <a:r>
-              <a:rPr lang="en-US" dirty="0" err="1">
-                <a:latin typeface="Arial" panose="020B0604020202020204" pitchFamily="34" charset="0"/>
-                <a:cs typeface="Arial" panose="020B0604020202020204" pitchFamily="34" charset="0"/>
-              </a:rPr>
-              <a:t>Distribs</a:t>
-            </a:r>
-            <a:r>
-              <a:rPr lang="en-US" dirty="0">
-                <a:latin typeface="Arial" panose="020B0604020202020204" pitchFamily="34" charset="0"/>
-                <a:cs typeface="Arial" panose="020B0604020202020204" pitchFamily="34" charset="0"/>
-              </a:rPr>
-              <a:t> se </a:t>
-            </a:r>
-            <a:r>
-              <a:rPr lang="en-US" dirty="0" err="1">
-                <a:latin typeface="Arial" panose="020B0604020202020204" pitchFamily="34" charset="0"/>
-                <a:cs typeface="Arial" panose="020B0604020202020204" pitchFamily="34" charset="0"/>
-              </a:rPr>
-              <a:t>defini</a:t>
-            </a:r>
-            <a:r>
-              <a:rPr lang="bs-Latn-BA" dirty="0">
-                <a:latin typeface="Arial" panose="020B0604020202020204" pitchFamily="34" charset="0"/>
-                <a:cs typeface="Arial" panose="020B0604020202020204" pitchFamily="34" charset="0"/>
-              </a:rPr>
-              <a:t>še Gaussova raspodjela šuma</a:t>
-            </a:r>
-          </a:p>
-          <a:p>
-            <a:pPr marL="285750" indent="-285750">
-              <a:buFont typeface="Arial" panose="020B0604020202020204" pitchFamily="34" charset="0"/>
-              <a:buChar char="•"/>
-            </a:pPr>
-            <a:r>
-              <a:rPr lang="bs-Latn-BA" dirty="0">
-                <a:latin typeface="Arial" panose="020B0604020202020204" pitchFamily="34" charset="0"/>
-                <a:cs typeface="Arial" panose="020B0604020202020204" pitchFamily="34" charset="0"/>
-              </a:rPr>
-              <a:t>U PreProc se šum dodaje mjerenim injekcijama kompleksne snage</a:t>
-            </a:r>
-          </a:p>
-          <a:p>
-            <a:pPr marL="285750" indent="-285750">
-              <a:buFont typeface="Arial" panose="020B0604020202020204" pitchFamily="34" charset="0"/>
-              <a:buChar char="•"/>
-            </a:pPr>
-            <a:r>
-              <a:rPr lang="bs-Latn-BA" dirty="0">
-                <a:latin typeface="Arial" panose="020B0604020202020204" pitchFamily="34" charset="0"/>
-                <a:cs typeface="Arial" panose="020B0604020202020204" pitchFamily="34" charset="0"/>
-              </a:rPr>
-              <a:t>WLS procjenjuje stanje iz zašumljenih mjerenja snage,zero-injection ograničenja i referentnih napona</a:t>
-            </a:r>
-            <a:endParaRPr lang="en-US" dirty="0">
-              <a:latin typeface="Arial" panose="020B0604020202020204" pitchFamily="34" charset="0"/>
-              <a:cs typeface="Arial" panose="020B0604020202020204" pitchFamily="34" charset="0"/>
-            </a:endParaRPr>
-          </a:p>
-        </p:txBody>
-      </p:sp>
-    </p:spTree>
-  </p:cSld>
-  <p:clrMapOvr>
-    <a:masterClrMapping/>
-  </p:clrMapOvr>
-</p:sld>
-</file>
-
-<file path=ppt/slides/slide8.xml><?xml version="1.0" encoding="utf-8"?>
-<p:sld xmlns:a="http://schemas.openxmlformats.org/drawingml/2006/main" xmlns:r="http://schemas.openxmlformats.org/officeDocument/2006/relationships" xmlns:p="http://schemas.openxmlformats.org/presentationml/2006/main">
   <p:cSld>
     <p:spTree>
       <p:nvGrpSpPr>
@@ -9912,7 +8786,7 @@
         <p:spPr>
           <a:xfrm>
             <a:off x="411480" y="228600"/>
-            <a:ext cx="8382166" cy="446276"/>
+            <a:ext cx="8843831" cy="446276"/>
           </a:xfrm>
           <a:prstGeom prst="rect">
             <a:avLst/>
@@ -9925,7 +8799,7 @@
           </a:bodyPr>
           <a:lstStyle/>
           <a:p>
-            <a:pPr>
+            <a:pPr lvl="1">
               <a:defRPr sz="2300" b="1">
                 <a:solidFill>
                   <a:srgbClr val="1C1C1C"/>
@@ -12027,6 +10901,761 @@
 </p:sld>
 </file>
 
+<file path=ppt/slides/slide8.xml><?xml version="1.0" encoding="utf-8"?>
+<p:sld xmlns:a="http://schemas.openxmlformats.org/drawingml/2006/main" xmlns:r="http://schemas.openxmlformats.org/officeDocument/2006/relationships" xmlns:p="http://schemas.openxmlformats.org/presentationml/2006/main">
+  <p:cSld>
+    <p:spTree>
+      <p:nvGrpSpPr>
+        <p:cNvPr id="1" name=""/>
+        <p:cNvGrpSpPr/>
+        <p:nvPr/>
+      </p:nvGrpSpPr>
+      <p:grpSpPr>
+        <a:xfrm>
+          <a:off x="0" y="0"/>
+          <a:ext cx="0" cy="0"/>
+          <a:chOff x="0" y="0"/>
+          <a:chExt cx="0" cy="0"/>
+        </a:xfrm>
+      </p:grpSpPr>
+      <p:sp>
+        <p:nvSpPr>
+          <p:cNvPr id="2" name="TextBox 1"/>
+          <p:cNvSpPr txBox="1"/>
+          <p:nvPr/>
+        </p:nvSpPr>
+        <p:spPr>
+          <a:xfrm>
+            <a:off x="411480" y="228600"/>
+            <a:ext cx="5137945" cy="446276"/>
+          </a:xfrm>
+          <a:prstGeom prst="rect">
+            <a:avLst/>
+          </a:prstGeom>
+          <a:noFill/>
+        </p:spPr>
+        <p:txBody>
+          <a:bodyPr wrap="none">
+            <a:spAutoFit/>
+          </a:bodyPr>
+          <a:lstStyle/>
+          <a:p>
+            <a:pPr>
+              <a:defRPr sz="2300" b="1">
+                <a:solidFill>
+                  <a:srgbClr val="1C1C1C"/>
+                </a:solidFill>
+              </a:defRPr>
+            </a:pPr>
+            <a:r>
+              <a:rPr dirty="0" err="1">
+                <a:latin typeface="Arial" panose="020B0604020202020204" pitchFamily="34" charset="0"/>
+                <a:cs typeface="Arial" panose="020B0604020202020204" pitchFamily="34" charset="0"/>
+              </a:rPr>
+              <a:t>Poređenje</a:t>
+            </a:r>
+            <a:r>
+              <a:rPr dirty="0">
+                <a:latin typeface="Arial" panose="020B0604020202020204" pitchFamily="34" charset="0"/>
+                <a:cs typeface="Arial" panose="020B0604020202020204" pitchFamily="34" charset="0"/>
+              </a:rPr>
+              <a:t> </a:t>
+            </a:r>
+            <a:r>
+              <a:rPr dirty="0" err="1">
+                <a:latin typeface="Arial" panose="020B0604020202020204" pitchFamily="34" charset="0"/>
+                <a:cs typeface="Arial" panose="020B0604020202020204" pitchFamily="34" charset="0"/>
+              </a:rPr>
+              <a:t>amplituda</a:t>
+            </a:r>
+            <a:r>
+              <a:rPr dirty="0">
+                <a:latin typeface="Arial" panose="020B0604020202020204" pitchFamily="34" charset="0"/>
+                <a:cs typeface="Arial" panose="020B0604020202020204" pitchFamily="34" charset="0"/>
+              </a:rPr>
+              <a:t> </a:t>
+            </a:r>
+            <a:r>
+              <a:rPr dirty="0" err="1">
+                <a:latin typeface="Arial" panose="020B0604020202020204" pitchFamily="34" charset="0"/>
+                <a:cs typeface="Arial" panose="020B0604020202020204" pitchFamily="34" charset="0"/>
+              </a:rPr>
+              <a:t>faznih</a:t>
+            </a:r>
+            <a:r>
+              <a:rPr dirty="0">
+                <a:latin typeface="Arial" panose="020B0604020202020204" pitchFamily="34" charset="0"/>
+                <a:cs typeface="Arial" panose="020B0604020202020204" pitchFamily="34" charset="0"/>
+              </a:rPr>
+              <a:t> </a:t>
+            </a:r>
+            <a:r>
+              <a:rPr dirty="0" err="1">
+                <a:latin typeface="Arial" panose="020B0604020202020204" pitchFamily="34" charset="0"/>
+                <a:cs typeface="Arial" panose="020B0604020202020204" pitchFamily="34" charset="0"/>
+              </a:rPr>
+              <a:t>napona</a:t>
+            </a:r>
+            <a:endParaRPr dirty="0">
+              <a:latin typeface="Arial" panose="020B0604020202020204" pitchFamily="34" charset="0"/>
+              <a:cs typeface="Arial" panose="020B0604020202020204" pitchFamily="34" charset="0"/>
+            </a:endParaRPr>
+          </a:p>
+        </p:txBody>
+      </p:sp>
+      <p:sp>
+        <p:nvSpPr>
+          <p:cNvPr id="3" name="TextBox 2"/>
+          <p:cNvSpPr txBox="1"/>
+          <p:nvPr/>
+        </p:nvSpPr>
+        <p:spPr>
+          <a:xfrm>
+            <a:off x="438912" y="658368"/>
+            <a:ext cx="6571030" cy="269304"/>
+          </a:xfrm>
+          <a:prstGeom prst="rect">
+            <a:avLst/>
+          </a:prstGeom>
+          <a:noFill/>
+        </p:spPr>
+        <p:txBody>
+          <a:bodyPr wrap="none">
+            <a:spAutoFit/>
+          </a:bodyPr>
+          <a:lstStyle/>
+          <a:p>
+            <a:pPr>
+              <a:defRPr sz="1150">
+                <a:solidFill>
+                  <a:srgbClr val="555555"/>
+                </a:solidFill>
+              </a:defRPr>
+            </a:pPr>
+            <a:r>
+              <a:rPr dirty="0" err="1">
+                <a:latin typeface="Arial" panose="020B0604020202020204" pitchFamily="34" charset="0"/>
+                <a:cs typeface="Arial" panose="020B0604020202020204" pitchFamily="34" charset="0"/>
+              </a:rPr>
+              <a:t>Grafički</a:t>
+            </a:r>
+            <a:r>
+              <a:rPr dirty="0">
+                <a:latin typeface="Arial" panose="020B0604020202020204" pitchFamily="34" charset="0"/>
+                <a:cs typeface="Arial" panose="020B0604020202020204" pitchFamily="34" charset="0"/>
+              </a:rPr>
+              <a:t> </a:t>
+            </a:r>
+            <a:r>
+              <a:rPr dirty="0" err="1">
+                <a:latin typeface="Arial" panose="020B0604020202020204" pitchFamily="34" charset="0"/>
+                <a:cs typeface="Arial" panose="020B0604020202020204" pitchFamily="34" charset="0"/>
+              </a:rPr>
+              <a:t>prikaz</a:t>
+            </a:r>
+            <a:r>
+              <a:rPr dirty="0">
+                <a:latin typeface="Arial" panose="020B0604020202020204" pitchFamily="34" charset="0"/>
+                <a:cs typeface="Arial" panose="020B0604020202020204" pitchFamily="34" charset="0"/>
+              </a:rPr>
+              <a:t> </a:t>
+            </a:r>
+            <a:r>
+              <a:rPr dirty="0" err="1">
+                <a:latin typeface="Arial" panose="020B0604020202020204" pitchFamily="34" charset="0"/>
+                <a:cs typeface="Arial" panose="020B0604020202020204" pitchFamily="34" charset="0"/>
+              </a:rPr>
+              <a:t>potvrđuje</a:t>
+            </a:r>
+            <a:r>
+              <a:rPr dirty="0">
+                <a:latin typeface="Arial" panose="020B0604020202020204" pitchFamily="34" charset="0"/>
+                <a:cs typeface="Arial" panose="020B0604020202020204" pitchFamily="34" charset="0"/>
+              </a:rPr>
+              <a:t> </a:t>
+            </a:r>
+            <a:r>
+              <a:rPr dirty="0" err="1">
+                <a:latin typeface="Arial" panose="020B0604020202020204" pitchFamily="34" charset="0"/>
+                <a:cs typeface="Arial" panose="020B0604020202020204" pitchFamily="34" charset="0"/>
+              </a:rPr>
+              <a:t>isti</a:t>
+            </a:r>
+            <a:r>
+              <a:rPr dirty="0">
+                <a:latin typeface="Arial" panose="020B0604020202020204" pitchFamily="34" charset="0"/>
+                <a:cs typeface="Arial" panose="020B0604020202020204" pitchFamily="34" charset="0"/>
+              </a:rPr>
+              <a:t> trend </a:t>
+            </a:r>
+            <a:r>
+              <a:rPr dirty="0" err="1">
+                <a:latin typeface="Arial" panose="020B0604020202020204" pitchFamily="34" charset="0"/>
+                <a:cs typeface="Arial" panose="020B0604020202020204" pitchFamily="34" charset="0"/>
+              </a:rPr>
+              <a:t>kao</a:t>
+            </a:r>
+            <a:r>
+              <a:rPr dirty="0">
+                <a:latin typeface="Arial" panose="020B0604020202020204" pitchFamily="34" charset="0"/>
+                <a:cs typeface="Arial" panose="020B0604020202020204" pitchFamily="34" charset="0"/>
+              </a:rPr>
+              <a:t> </a:t>
+            </a:r>
+            <a:r>
+              <a:rPr dirty="0" err="1">
+                <a:latin typeface="Arial" panose="020B0604020202020204" pitchFamily="34" charset="0"/>
+                <a:cs typeface="Arial" panose="020B0604020202020204" pitchFamily="34" charset="0"/>
+              </a:rPr>
+              <a:t>referentna</a:t>
+            </a:r>
+            <a:r>
+              <a:rPr dirty="0">
+                <a:latin typeface="Arial" panose="020B0604020202020204" pitchFamily="34" charset="0"/>
+                <a:cs typeface="Arial" panose="020B0604020202020204" pitchFamily="34" charset="0"/>
+              </a:rPr>
+              <a:t> </a:t>
+            </a:r>
+            <a:r>
+              <a:rPr dirty="0" err="1">
+                <a:latin typeface="Arial" panose="020B0604020202020204" pitchFamily="34" charset="0"/>
+                <a:cs typeface="Arial" panose="020B0604020202020204" pitchFamily="34" charset="0"/>
+              </a:rPr>
+              <a:t>tabela</a:t>
+            </a:r>
+            <a:r>
+              <a:rPr dirty="0">
+                <a:latin typeface="Arial" panose="020B0604020202020204" pitchFamily="34" charset="0"/>
+                <a:cs typeface="Arial" panose="020B0604020202020204" pitchFamily="34" charset="0"/>
+              </a:rPr>
+              <a:t>: pad </a:t>
+            </a:r>
+            <a:r>
+              <a:rPr dirty="0" err="1">
+                <a:latin typeface="Arial" panose="020B0604020202020204" pitchFamily="34" charset="0"/>
+                <a:cs typeface="Arial" panose="020B0604020202020204" pitchFamily="34" charset="0"/>
+              </a:rPr>
+              <a:t>napona</a:t>
+            </a:r>
+            <a:r>
+              <a:rPr dirty="0">
+                <a:latin typeface="Arial" panose="020B0604020202020204" pitchFamily="34" charset="0"/>
+                <a:cs typeface="Arial" panose="020B0604020202020204" pitchFamily="34" charset="0"/>
+              </a:rPr>
+              <a:t> </a:t>
+            </a:r>
+            <a:r>
+              <a:rPr dirty="0" err="1">
+                <a:latin typeface="Arial" panose="020B0604020202020204" pitchFamily="34" charset="0"/>
+                <a:cs typeface="Arial" panose="020B0604020202020204" pitchFamily="34" charset="0"/>
+              </a:rPr>
+              <a:t>prema</a:t>
+            </a:r>
+            <a:r>
+              <a:rPr dirty="0">
+                <a:latin typeface="Arial" panose="020B0604020202020204" pitchFamily="34" charset="0"/>
+                <a:cs typeface="Arial" panose="020B0604020202020204" pitchFamily="34" charset="0"/>
+              </a:rPr>
+              <a:t> </a:t>
+            </a:r>
+            <a:r>
+              <a:rPr dirty="0" err="1">
+                <a:latin typeface="Arial" panose="020B0604020202020204" pitchFamily="34" charset="0"/>
+                <a:cs typeface="Arial" panose="020B0604020202020204" pitchFamily="34" charset="0"/>
+              </a:rPr>
+              <a:t>udaljenijim</a:t>
+            </a:r>
+            <a:r>
+              <a:rPr dirty="0">
+                <a:latin typeface="Arial" panose="020B0604020202020204" pitchFamily="34" charset="0"/>
+                <a:cs typeface="Arial" panose="020B0604020202020204" pitchFamily="34" charset="0"/>
+              </a:rPr>
+              <a:t> </a:t>
+            </a:r>
+            <a:r>
+              <a:rPr dirty="0" err="1">
+                <a:latin typeface="Arial" panose="020B0604020202020204" pitchFamily="34" charset="0"/>
+                <a:cs typeface="Arial" panose="020B0604020202020204" pitchFamily="34" charset="0"/>
+              </a:rPr>
+              <a:t>čvorovima</a:t>
+            </a:r>
+            <a:endParaRPr dirty="0">
+              <a:latin typeface="Arial" panose="020B0604020202020204" pitchFamily="34" charset="0"/>
+              <a:cs typeface="Arial" panose="020B0604020202020204" pitchFamily="34" charset="0"/>
+            </a:endParaRPr>
+          </a:p>
+        </p:txBody>
+      </p:sp>
+      <p:sp>
+        <p:nvSpPr>
+          <p:cNvPr id="4" name="Rectangle 3"/>
+          <p:cNvSpPr/>
+          <p:nvPr/>
+        </p:nvSpPr>
+        <p:spPr>
+          <a:xfrm>
+            <a:off x="411480" y="987552"/>
+            <a:ext cx="11384280" cy="27432"/>
+          </a:xfrm>
+          <a:prstGeom prst="rect">
+            <a:avLst/>
+          </a:prstGeom>
+          <a:solidFill>
+            <a:srgbClr val="1E6BB1"/>
+          </a:solidFill>
+          <a:ln>
+            <a:noFill/>
+          </a:ln>
+        </p:spPr>
+        <p:style>
+          <a:lnRef idx="1">
+            <a:schemeClr val="accent1"/>
+          </a:lnRef>
+          <a:fillRef idx="3">
+            <a:schemeClr val="accent1"/>
+          </a:fillRef>
+          <a:effectRef idx="2">
+            <a:schemeClr val="accent1"/>
+          </a:effectRef>
+          <a:fontRef idx="minor">
+            <a:schemeClr val="lt1"/>
+          </a:fontRef>
+        </p:style>
+        <p:txBody>
+          <a:bodyPr rtlCol="0" anchor="ctr"/>
+          <a:lstStyle/>
+          <a:p>
+            <a:pPr algn="ctr"/>
+            <a:endParaRPr/>
+          </a:p>
+        </p:txBody>
+      </p:sp>
+      <p:sp>
+        <p:nvSpPr>
+          <p:cNvPr id="5" name="TextBox 4"/>
+          <p:cNvSpPr txBox="1"/>
+          <p:nvPr/>
+        </p:nvSpPr>
+        <p:spPr>
+          <a:xfrm>
+            <a:off x="10698480" y="6547104"/>
+            <a:ext cx="914400" cy="201168"/>
+          </a:xfrm>
+          <a:prstGeom prst="rect">
+            <a:avLst/>
+          </a:prstGeom>
+          <a:noFill/>
+        </p:spPr>
+        <p:txBody>
+          <a:bodyPr wrap="none">
+            <a:spAutoFit/>
+          </a:bodyPr>
+          <a:lstStyle/>
+          <a:p>
+            <a:pPr>
+              <a:defRPr sz="850">
+                <a:solidFill>
+                  <a:srgbClr val="555555"/>
+                </a:solidFill>
+              </a:defRPr>
+            </a:pPr>
+            <a:r>
+              <a:t>SREES</a:t>
+            </a:r>
+          </a:p>
+        </p:txBody>
+      </p:sp>
+      <p:sp>
+        <p:nvSpPr>
+          <p:cNvPr id="6" name="Rounded Rectangle 5"/>
+          <p:cNvSpPr/>
+          <p:nvPr/>
+        </p:nvSpPr>
+        <p:spPr>
+          <a:xfrm>
+            <a:off x="502920" y="1234440"/>
+            <a:ext cx="11109960" cy="4434840"/>
+          </a:xfrm>
+          <a:prstGeom prst="roundRect">
+            <a:avLst/>
+          </a:prstGeom>
+          <a:solidFill>
+            <a:srgbClr val="FFFFFF"/>
+          </a:solidFill>
+          <a:ln w="10160">
+            <a:solidFill>
+              <a:srgbClr val="D2D2D2"/>
+            </a:solidFill>
+          </a:ln>
+        </p:spPr>
+        <p:style>
+          <a:lnRef idx="1">
+            <a:schemeClr val="accent1"/>
+          </a:lnRef>
+          <a:fillRef idx="3">
+            <a:schemeClr val="accent1"/>
+          </a:fillRef>
+          <a:effectRef idx="2">
+            <a:schemeClr val="accent1"/>
+          </a:effectRef>
+          <a:fontRef idx="minor">
+            <a:schemeClr val="lt1"/>
+          </a:fontRef>
+        </p:style>
+        <p:txBody>
+          <a:bodyPr rtlCol="0" anchor="ctr"/>
+          <a:lstStyle/>
+          <a:p>
+            <a:pPr algn="ctr"/>
+            <a:endParaRPr/>
+          </a:p>
+        </p:txBody>
+      </p:sp>
+      <p:pic>
+        <p:nvPicPr>
+          <p:cNvPr id="7" name="Picture 6" descr="amp_large_crop.png"/>
+          <p:cNvPicPr>
+            <a:picLocks noChangeAspect="1"/>
+          </p:cNvPicPr>
+          <p:nvPr/>
+        </p:nvPicPr>
+        <p:blipFill>
+          <a:blip r:embed="rId2"/>
+          <a:stretch>
+            <a:fillRect/>
+          </a:stretch>
+        </p:blipFill>
+        <p:spPr>
+          <a:xfrm>
+            <a:off x="1599840" y="1234440"/>
+            <a:ext cx="8916118" cy="4434840"/>
+          </a:xfrm>
+          <a:prstGeom prst="rect">
+            <a:avLst/>
+          </a:prstGeom>
+        </p:spPr>
+      </p:pic>
+      <p:sp>
+        <p:nvSpPr>
+          <p:cNvPr id="8" name="Rounded Rectangle 7"/>
+          <p:cNvSpPr/>
+          <p:nvPr/>
+        </p:nvSpPr>
+        <p:spPr>
+          <a:xfrm>
+            <a:off x="777240" y="5788152"/>
+            <a:ext cx="3429000" cy="594360"/>
+          </a:xfrm>
+          <a:prstGeom prst="roundRect">
+            <a:avLst/>
+          </a:prstGeom>
+          <a:solidFill>
+            <a:srgbClr val="F5FAFD"/>
+          </a:solidFill>
+          <a:ln w="8890">
+            <a:solidFill>
+              <a:srgbClr val="919191"/>
+            </a:solidFill>
+          </a:ln>
+        </p:spPr>
+        <p:style>
+          <a:lnRef idx="1">
+            <a:schemeClr val="accent1"/>
+          </a:lnRef>
+          <a:fillRef idx="3">
+            <a:schemeClr val="accent1"/>
+          </a:fillRef>
+          <a:effectRef idx="2">
+            <a:schemeClr val="accent1"/>
+          </a:effectRef>
+          <a:fontRef idx="minor">
+            <a:schemeClr val="lt1"/>
+          </a:fontRef>
+        </p:style>
+        <p:txBody>
+          <a:bodyPr lIns="118872" tIns="73152" rIns="118872" bIns="54864" rtlCol="0" anchor="ctr"/>
+          <a:lstStyle/>
+          <a:p>
+            <a:pPr algn="ctr">
+              <a:defRPr sz="1250" b="1">
+                <a:solidFill>
+                  <a:srgbClr val="1C1C1C"/>
+                </a:solidFill>
+              </a:defRPr>
+            </a:pPr>
+            <a:r>
+              <a:rPr dirty="0">
+                <a:latin typeface="Arial" panose="020B0604020202020204" pitchFamily="34" charset="0"/>
+                <a:cs typeface="Arial" panose="020B0604020202020204" pitchFamily="34" charset="0"/>
+              </a:rPr>
+              <a:t>V2</a:t>
+            </a:r>
+          </a:p>
+          <a:p>
+            <a:pPr>
+              <a:spcBef>
+                <a:spcPts val="400"/>
+              </a:spcBef>
+              <a:defRPr sz="1019">
+                <a:solidFill>
+                  <a:srgbClr val="1C1C1C"/>
+                </a:solidFill>
+              </a:defRPr>
+            </a:pPr>
+            <a:r>
+              <a:rPr dirty="0" err="1">
+                <a:latin typeface="Arial" panose="020B0604020202020204" pitchFamily="34" charset="0"/>
+                <a:cs typeface="Arial" panose="020B0604020202020204" pitchFamily="34" charset="0"/>
+              </a:rPr>
+              <a:t>oko</a:t>
+            </a:r>
+            <a:r>
+              <a:rPr dirty="0">
+                <a:latin typeface="Arial" panose="020B0604020202020204" pitchFamily="34" charset="0"/>
+                <a:cs typeface="Arial" panose="020B0604020202020204" pitchFamily="34" charset="0"/>
+              </a:rPr>
+              <a:t> 0.988 – 0.992 </a:t>
+            </a:r>
+            <a:r>
+              <a:rPr dirty="0" err="1">
+                <a:latin typeface="Arial" panose="020B0604020202020204" pitchFamily="34" charset="0"/>
+                <a:cs typeface="Arial" panose="020B0604020202020204" pitchFamily="34" charset="0"/>
+              </a:rPr>
+              <a:t>p.u</a:t>
+            </a:r>
+            <a:r>
+              <a:rPr dirty="0">
+                <a:latin typeface="Arial" panose="020B0604020202020204" pitchFamily="34" charset="0"/>
+                <a:cs typeface="Arial" panose="020B0604020202020204" pitchFamily="34" charset="0"/>
+              </a:rPr>
+              <a:t>.</a:t>
+            </a:r>
+          </a:p>
+        </p:txBody>
+      </p:sp>
+      <p:sp>
+        <p:nvSpPr>
+          <p:cNvPr id="9" name="Rounded Rectangle 8"/>
+          <p:cNvSpPr/>
+          <p:nvPr/>
+        </p:nvSpPr>
+        <p:spPr>
+          <a:xfrm>
+            <a:off x="4434840" y="5788152"/>
+            <a:ext cx="3429000" cy="594360"/>
+          </a:xfrm>
+          <a:prstGeom prst="roundRect">
+            <a:avLst/>
+          </a:prstGeom>
+          <a:solidFill>
+            <a:srgbClr val="F5FAFD"/>
+          </a:solidFill>
+          <a:ln w="8890">
+            <a:solidFill>
+              <a:srgbClr val="919191"/>
+            </a:solidFill>
+          </a:ln>
+        </p:spPr>
+        <p:style>
+          <a:lnRef idx="1">
+            <a:schemeClr val="accent1"/>
+          </a:lnRef>
+          <a:fillRef idx="3">
+            <a:schemeClr val="accent1"/>
+          </a:fillRef>
+          <a:effectRef idx="2">
+            <a:schemeClr val="accent1"/>
+          </a:effectRef>
+          <a:fontRef idx="minor">
+            <a:schemeClr val="lt1"/>
+          </a:fontRef>
+        </p:style>
+        <p:txBody>
+          <a:bodyPr lIns="118872" tIns="73152" rIns="118872" bIns="54864" rtlCol="0" anchor="ctr"/>
+          <a:lstStyle/>
+          <a:p>
+            <a:pPr algn="ctr">
+              <a:defRPr sz="1250" b="1">
+                <a:solidFill>
+                  <a:srgbClr val="1C1C1C"/>
+                </a:solidFill>
+              </a:defRPr>
+            </a:pPr>
+            <a:r>
+              <a:rPr dirty="0">
+                <a:latin typeface="Arial" panose="020B0604020202020204" pitchFamily="34" charset="0"/>
+                <a:cs typeface="Arial" panose="020B0604020202020204" pitchFamily="34" charset="0"/>
+              </a:rPr>
+              <a:t>V3</a:t>
+            </a:r>
+          </a:p>
+          <a:p>
+            <a:pPr>
+              <a:spcBef>
+                <a:spcPts val="400"/>
+              </a:spcBef>
+              <a:defRPr sz="1019">
+                <a:solidFill>
+                  <a:srgbClr val="1C1C1C"/>
+                </a:solidFill>
+              </a:defRPr>
+            </a:pPr>
+            <a:r>
+              <a:rPr dirty="0" err="1">
+                <a:latin typeface="Arial" panose="020B0604020202020204" pitchFamily="34" charset="0"/>
+                <a:cs typeface="Arial" panose="020B0604020202020204" pitchFamily="34" charset="0"/>
+              </a:rPr>
+              <a:t>oko</a:t>
+            </a:r>
+            <a:r>
+              <a:rPr dirty="0">
+                <a:latin typeface="Arial" panose="020B0604020202020204" pitchFamily="34" charset="0"/>
+                <a:cs typeface="Arial" panose="020B0604020202020204" pitchFamily="34" charset="0"/>
+              </a:rPr>
+              <a:t> 0.937 – 0.945 </a:t>
+            </a:r>
+            <a:r>
+              <a:rPr dirty="0" err="1">
+                <a:latin typeface="Arial" panose="020B0604020202020204" pitchFamily="34" charset="0"/>
+                <a:cs typeface="Arial" panose="020B0604020202020204" pitchFamily="34" charset="0"/>
+              </a:rPr>
+              <a:t>p.u</a:t>
+            </a:r>
+            <a:r>
+              <a:rPr dirty="0">
+                <a:latin typeface="Arial" panose="020B0604020202020204" pitchFamily="34" charset="0"/>
+                <a:cs typeface="Arial" panose="020B0604020202020204" pitchFamily="34" charset="0"/>
+              </a:rPr>
+              <a:t>.</a:t>
+            </a:r>
+          </a:p>
+        </p:txBody>
+      </p:sp>
+      <p:sp>
+        <p:nvSpPr>
+          <p:cNvPr id="10" name="Rounded Rectangle 9"/>
+          <p:cNvSpPr/>
+          <p:nvPr/>
+        </p:nvSpPr>
+        <p:spPr>
+          <a:xfrm>
+            <a:off x="8092440" y="5788152"/>
+            <a:ext cx="3429000" cy="594360"/>
+          </a:xfrm>
+          <a:prstGeom prst="roundRect">
+            <a:avLst/>
+          </a:prstGeom>
+          <a:solidFill>
+            <a:srgbClr val="F5FAFD"/>
+          </a:solidFill>
+          <a:ln w="8890">
+            <a:solidFill>
+              <a:srgbClr val="919191"/>
+            </a:solidFill>
+          </a:ln>
+        </p:spPr>
+        <p:style>
+          <a:lnRef idx="1">
+            <a:schemeClr val="accent1"/>
+          </a:lnRef>
+          <a:fillRef idx="3">
+            <a:schemeClr val="accent1"/>
+          </a:fillRef>
+          <a:effectRef idx="2">
+            <a:schemeClr val="accent1"/>
+          </a:effectRef>
+          <a:fontRef idx="minor">
+            <a:schemeClr val="lt1"/>
+          </a:fontRef>
+        </p:style>
+        <p:txBody>
+          <a:bodyPr lIns="118872" tIns="73152" rIns="118872" bIns="54864" rtlCol="0" anchor="ctr"/>
+          <a:lstStyle/>
+          <a:p>
+            <a:pPr algn="ctr">
+              <a:defRPr sz="1250" b="1">
+                <a:solidFill>
+                  <a:srgbClr val="1C1C1C"/>
+                </a:solidFill>
+              </a:defRPr>
+            </a:pPr>
+            <a:r>
+              <a:rPr dirty="0">
+                <a:latin typeface="Arial" panose="020B0604020202020204" pitchFamily="34" charset="0"/>
+                <a:cs typeface="Arial" panose="020B0604020202020204" pitchFamily="34" charset="0"/>
+              </a:rPr>
+              <a:t>V4</a:t>
+            </a:r>
+          </a:p>
+          <a:p>
+            <a:pPr>
+              <a:spcBef>
+                <a:spcPts val="400"/>
+              </a:spcBef>
+              <a:defRPr sz="1019">
+                <a:solidFill>
+                  <a:srgbClr val="1C1C1C"/>
+                </a:solidFill>
+              </a:defRPr>
+            </a:pPr>
+            <a:r>
+              <a:rPr dirty="0" err="1">
+                <a:latin typeface="Arial" panose="020B0604020202020204" pitchFamily="34" charset="0"/>
+                <a:cs typeface="Arial" panose="020B0604020202020204" pitchFamily="34" charset="0"/>
+              </a:rPr>
+              <a:t>najveći</a:t>
+            </a:r>
+            <a:r>
+              <a:rPr dirty="0">
+                <a:latin typeface="Arial" panose="020B0604020202020204" pitchFamily="34" charset="0"/>
+                <a:cs typeface="Arial" panose="020B0604020202020204" pitchFamily="34" charset="0"/>
+              </a:rPr>
+              <a:t> pad: </a:t>
+            </a:r>
+            <a:r>
+              <a:rPr dirty="0" err="1">
+                <a:latin typeface="Arial" panose="020B0604020202020204" pitchFamily="34" charset="0"/>
+                <a:cs typeface="Arial" panose="020B0604020202020204" pitchFamily="34" charset="0"/>
+              </a:rPr>
+              <a:t>oko</a:t>
+            </a:r>
+            <a:r>
+              <a:rPr dirty="0">
+                <a:latin typeface="Arial" panose="020B0604020202020204" pitchFamily="34" charset="0"/>
+                <a:cs typeface="Arial" panose="020B0604020202020204" pitchFamily="34" charset="0"/>
+              </a:rPr>
+              <a:t> 0.806 – 0.864 </a:t>
+            </a:r>
+            <a:r>
+              <a:rPr dirty="0" err="1">
+                <a:latin typeface="Arial" panose="020B0604020202020204" pitchFamily="34" charset="0"/>
+                <a:cs typeface="Arial" panose="020B0604020202020204" pitchFamily="34" charset="0"/>
+              </a:rPr>
+              <a:t>p.u</a:t>
+            </a:r>
+            <a:r>
+              <a:rPr dirty="0">
+                <a:latin typeface="Arial" panose="020B0604020202020204" pitchFamily="34" charset="0"/>
+                <a:cs typeface="Arial" panose="020B0604020202020204" pitchFamily="34" charset="0"/>
+              </a:rPr>
+              <a:t>.</a:t>
+            </a:r>
+          </a:p>
+        </p:txBody>
+      </p:sp>
+    </p:spTree>
+    <p:extLst>
+      <p:ext uri="{BB962C8B-B14F-4D97-AF65-F5344CB8AC3E}">
+        <p14:creationId xmlns:p14="http://schemas.microsoft.com/office/powerpoint/2010/main" val="3255945694"/>
+      </p:ext>
+    </p:extLst>
+  </p:cSld>
+  <p:clrMapOvr>
+    <a:masterClrMapping/>
+  </p:clrMapOvr>
+</p:sld>
+</file>
+
 <file path=ppt/slides/slide9.xml><?xml version="1.0" encoding="utf-8"?>
 <p:sld xmlns:a="http://schemas.openxmlformats.org/drawingml/2006/main" xmlns:r="http://schemas.openxmlformats.org/officeDocument/2006/relationships" xmlns:p="http://schemas.openxmlformats.org/presentationml/2006/main">
   <p:cSld>
@@ -12053,7 +11682,7 @@
         <p:spPr>
           <a:xfrm>
             <a:off x="411480" y="228600"/>
-            <a:ext cx="5137945" cy="446276"/>
+            <a:ext cx="4695516" cy="446276"/>
           </a:xfrm>
           <a:prstGeom prst="rect">
             <a:avLst/>
@@ -12092,7 +11721,7 @@
                 <a:latin typeface="Arial" panose="020B0604020202020204" pitchFamily="34" charset="0"/>
                 <a:cs typeface="Arial" panose="020B0604020202020204" pitchFamily="34" charset="0"/>
               </a:rPr>
-              <a:t>amplituda</a:t>
+              <a:t>uglova</a:t>
             </a:r>
             <a:r>
               <a:rPr dirty="0">
@@ -12121,189 +11750,6 @@
                 <a:cs typeface="Arial" panose="020B0604020202020204" pitchFamily="34" charset="0"/>
               </a:rPr>
               <a:t>napona</a:t>
-            </a:r>
-            <a:endParaRPr dirty="0">
-              <a:latin typeface="Arial" panose="020B0604020202020204" pitchFamily="34" charset="0"/>
-              <a:cs typeface="Arial" panose="020B0604020202020204" pitchFamily="34" charset="0"/>
-            </a:endParaRPr>
-          </a:p>
-        </p:txBody>
-      </p:sp>
-      <p:sp>
-        <p:nvSpPr>
-          <p:cNvPr id="3" name="TextBox 2"/>
-          <p:cNvSpPr txBox="1"/>
-          <p:nvPr/>
-        </p:nvSpPr>
-        <p:spPr>
-          <a:xfrm>
-            <a:off x="438912" y="658368"/>
-            <a:ext cx="6571030" cy="269304"/>
-          </a:xfrm>
-          <a:prstGeom prst="rect">
-            <a:avLst/>
-          </a:prstGeom>
-          <a:noFill/>
-        </p:spPr>
-        <p:txBody>
-          <a:bodyPr wrap="none">
-            <a:spAutoFit/>
-          </a:bodyPr>
-          <a:lstStyle/>
-          <a:p>
-            <a:pPr>
-              <a:defRPr sz="1150">
-                <a:solidFill>
-                  <a:srgbClr val="555555"/>
-                </a:solidFill>
-              </a:defRPr>
-            </a:pPr>
-            <a:r>
-              <a:rPr dirty="0" err="1">
-                <a:latin typeface="Arial" panose="020B0604020202020204" pitchFamily="34" charset="0"/>
-                <a:cs typeface="Arial" panose="020B0604020202020204" pitchFamily="34" charset="0"/>
-              </a:rPr>
-              <a:t>Grafički</a:t>
-            </a:r>
-            <a:r>
-              <a:rPr dirty="0">
-                <a:latin typeface="Arial" panose="020B0604020202020204" pitchFamily="34" charset="0"/>
-                <a:cs typeface="Arial" panose="020B0604020202020204" pitchFamily="34" charset="0"/>
-              </a:rPr>
-              <a:t> </a:t>
-            </a:r>
-            <a:r>
-              <a:rPr dirty="0" err="1">
-                <a:latin typeface="Arial" panose="020B0604020202020204" pitchFamily="34" charset="0"/>
-                <a:cs typeface="Arial" panose="020B0604020202020204" pitchFamily="34" charset="0"/>
-              </a:rPr>
-              <a:t>prikaz</a:t>
-            </a:r>
-            <a:r>
-              <a:rPr dirty="0">
-                <a:latin typeface="Arial" panose="020B0604020202020204" pitchFamily="34" charset="0"/>
-                <a:cs typeface="Arial" panose="020B0604020202020204" pitchFamily="34" charset="0"/>
-              </a:rPr>
-              <a:t> </a:t>
-            </a:r>
-            <a:r>
-              <a:rPr dirty="0" err="1">
-                <a:latin typeface="Arial" panose="020B0604020202020204" pitchFamily="34" charset="0"/>
-                <a:cs typeface="Arial" panose="020B0604020202020204" pitchFamily="34" charset="0"/>
-              </a:rPr>
-              <a:t>potvrđuje</a:t>
-            </a:r>
-            <a:r>
-              <a:rPr dirty="0">
-                <a:latin typeface="Arial" panose="020B0604020202020204" pitchFamily="34" charset="0"/>
-                <a:cs typeface="Arial" panose="020B0604020202020204" pitchFamily="34" charset="0"/>
-              </a:rPr>
-              <a:t> </a:t>
-            </a:r>
-            <a:r>
-              <a:rPr dirty="0" err="1">
-                <a:latin typeface="Arial" panose="020B0604020202020204" pitchFamily="34" charset="0"/>
-                <a:cs typeface="Arial" panose="020B0604020202020204" pitchFamily="34" charset="0"/>
-              </a:rPr>
-              <a:t>isti</a:t>
-            </a:r>
-            <a:r>
-              <a:rPr dirty="0">
-                <a:latin typeface="Arial" panose="020B0604020202020204" pitchFamily="34" charset="0"/>
-                <a:cs typeface="Arial" panose="020B0604020202020204" pitchFamily="34" charset="0"/>
-              </a:rPr>
-              <a:t> trend </a:t>
-            </a:r>
-            <a:r>
-              <a:rPr dirty="0" err="1">
-                <a:latin typeface="Arial" panose="020B0604020202020204" pitchFamily="34" charset="0"/>
-                <a:cs typeface="Arial" panose="020B0604020202020204" pitchFamily="34" charset="0"/>
-              </a:rPr>
-              <a:t>kao</a:t>
-            </a:r>
-            <a:r>
-              <a:rPr dirty="0">
-                <a:latin typeface="Arial" panose="020B0604020202020204" pitchFamily="34" charset="0"/>
-                <a:cs typeface="Arial" panose="020B0604020202020204" pitchFamily="34" charset="0"/>
-              </a:rPr>
-              <a:t> </a:t>
-            </a:r>
-            <a:r>
-              <a:rPr dirty="0" err="1">
-                <a:latin typeface="Arial" panose="020B0604020202020204" pitchFamily="34" charset="0"/>
-                <a:cs typeface="Arial" panose="020B0604020202020204" pitchFamily="34" charset="0"/>
-              </a:rPr>
-              <a:t>referentna</a:t>
-            </a:r>
-            <a:r>
-              <a:rPr dirty="0">
-                <a:latin typeface="Arial" panose="020B0604020202020204" pitchFamily="34" charset="0"/>
-                <a:cs typeface="Arial" panose="020B0604020202020204" pitchFamily="34" charset="0"/>
-              </a:rPr>
-              <a:t> </a:t>
-            </a:r>
-            <a:r>
-              <a:rPr dirty="0" err="1">
-                <a:latin typeface="Arial" panose="020B0604020202020204" pitchFamily="34" charset="0"/>
-                <a:cs typeface="Arial" panose="020B0604020202020204" pitchFamily="34" charset="0"/>
-              </a:rPr>
-              <a:t>tabela</a:t>
-            </a:r>
-            <a:r>
-              <a:rPr dirty="0">
-                <a:latin typeface="Arial" panose="020B0604020202020204" pitchFamily="34" charset="0"/>
-                <a:cs typeface="Arial" panose="020B0604020202020204" pitchFamily="34" charset="0"/>
-              </a:rPr>
-              <a:t>: pad </a:t>
-            </a:r>
-            <a:r>
-              <a:rPr dirty="0" err="1">
-                <a:latin typeface="Arial" panose="020B0604020202020204" pitchFamily="34" charset="0"/>
-                <a:cs typeface="Arial" panose="020B0604020202020204" pitchFamily="34" charset="0"/>
-              </a:rPr>
-              <a:t>napona</a:t>
-            </a:r>
-            <a:r>
-              <a:rPr dirty="0">
-                <a:latin typeface="Arial" panose="020B0604020202020204" pitchFamily="34" charset="0"/>
-                <a:cs typeface="Arial" panose="020B0604020202020204" pitchFamily="34" charset="0"/>
-              </a:rPr>
-              <a:t> </a:t>
-            </a:r>
-            <a:r>
-              <a:rPr dirty="0" err="1">
-                <a:latin typeface="Arial" panose="020B0604020202020204" pitchFamily="34" charset="0"/>
-                <a:cs typeface="Arial" panose="020B0604020202020204" pitchFamily="34" charset="0"/>
-              </a:rPr>
-              <a:t>prema</a:t>
-            </a:r>
-            <a:r>
-              <a:rPr dirty="0">
-                <a:latin typeface="Arial" panose="020B0604020202020204" pitchFamily="34" charset="0"/>
-                <a:cs typeface="Arial" panose="020B0604020202020204" pitchFamily="34" charset="0"/>
-              </a:rPr>
-              <a:t> </a:t>
-            </a:r>
-            <a:r>
-              <a:rPr dirty="0" err="1">
-                <a:latin typeface="Arial" panose="020B0604020202020204" pitchFamily="34" charset="0"/>
-                <a:cs typeface="Arial" panose="020B0604020202020204" pitchFamily="34" charset="0"/>
-              </a:rPr>
-              <a:t>udaljenijim</a:t>
-            </a:r>
-            <a:r>
-              <a:rPr dirty="0">
-                <a:latin typeface="Arial" panose="020B0604020202020204" pitchFamily="34" charset="0"/>
-                <a:cs typeface="Arial" panose="020B0604020202020204" pitchFamily="34" charset="0"/>
-              </a:rPr>
-              <a:t> </a:t>
-            </a:r>
-            <a:r>
-              <a:rPr dirty="0" err="1">
-                <a:latin typeface="Arial" panose="020B0604020202020204" pitchFamily="34" charset="0"/>
-                <a:cs typeface="Arial" panose="020B0604020202020204" pitchFamily="34" charset="0"/>
-              </a:rPr>
-              <a:t>čvorovima</a:t>
             </a:r>
             <a:endParaRPr dirty="0">
               <a:latin typeface="Arial" panose="020B0604020202020204" pitchFamily="34" charset="0"/>
@@ -12439,7 +11885,7 @@
       </p:sp>
       <p:pic>
         <p:nvPicPr>
-          <p:cNvPr id="7" name="Picture 6" descr="amp_large_crop.png"/>
+          <p:cNvPr id="7" name="Picture 6" descr="angle_large_crop.png"/>
           <p:cNvPicPr>
             <a:picLocks noChangeAspect="1"/>
           </p:cNvPicPr>
@@ -12510,11 +11956,18 @@
               </a:defRPr>
             </a:pPr>
             <a:r>
+              <a:rPr dirty="0" err="1">
+                <a:latin typeface="Arial" panose="020B0604020202020204" pitchFamily="34" charset="0"/>
+                <a:cs typeface="Arial" panose="020B0604020202020204" pitchFamily="34" charset="0"/>
+              </a:rPr>
+              <a:t>Faza</a:t>
+            </a:r>
+            <a:r>
               <a:rPr dirty="0">
                 <a:latin typeface="Arial" panose="020B0604020202020204" pitchFamily="34" charset="0"/>
                 <a:cs typeface="Arial" panose="020B0604020202020204" pitchFamily="34" charset="0"/>
               </a:rPr>
-              <a:t>V2</a:t>
+              <a:t> A</a:t>
             </a:r>
           </a:p>
           <a:p>
@@ -12533,28 +11986,28 @@
                 <a:latin typeface="Arial" panose="020B0604020202020204" pitchFamily="34" charset="0"/>
                 <a:cs typeface="Arial" panose="020B0604020202020204" pitchFamily="34" charset="0"/>
               </a:rPr>
-              <a:t>oko</a:t>
+              <a:t>ugao</a:t>
             </a:r>
             <a:r>
               <a:rPr dirty="0">
                 <a:latin typeface="Arial" panose="020B0604020202020204" pitchFamily="34" charset="0"/>
                 <a:cs typeface="Arial" panose="020B0604020202020204" pitchFamily="34" charset="0"/>
               </a:rPr>
-              <a:t> 0.988 – 0.992 </a:t>
+              <a:t> </a:t>
             </a:r>
             <a:r>
               <a:rPr dirty="0" err="1">
                 <a:latin typeface="Arial" panose="020B0604020202020204" pitchFamily="34" charset="0"/>
                 <a:cs typeface="Arial" panose="020B0604020202020204" pitchFamily="34" charset="0"/>
               </a:rPr>
-              <a:t>p.u</a:t>
+              <a:t>blizu</a:t>
             </a:r>
             <a:r>
               <a:rPr dirty="0">
                 <a:latin typeface="Arial" panose="020B0604020202020204" pitchFamily="34" charset="0"/>
                 <a:cs typeface="Arial" panose="020B0604020202020204" pitchFamily="34" charset="0"/>
               </a:rPr>
-              <a:t>.</a:t>
+              <a:t> 0 rad</a:t>
             </a:r>
           </a:p>
         </p:txBody>
@@ -12608,11 +12061,18 @@
               </a:defRPr>
             </a:pPr>
             <a:r>
+              <a:rPr dirty="0" err="1">
+                <a:latin typeface="Arial" panose="020B0604020202020204" pitchFamily="34" charset="0"/>
+                <a:cs typeface="Arial" panose="020B0604020202020204" pitchFamily="34" charset="0"/>
+              </a:rPr>
+              <a:t>Faza</a:t>
+            </a:r>
+            <a:r>
               <a:rPr dirty="0">
                 <a:latin typeface="Arial" panose="020B0604020202020204" pitchFamily="34" charset="0"/>
                 <a:cs typeface="Arial" panose="020B0604020202020204" pitchFamily="34" charset="0"/>
               </a:rPr>
-              <a:t>V3</a:t>
+              <a:t> B</a:t>
             </a:r>
           </a:p>
           <a:p>
@@ -12638,21 +12098,7 @@
                 <a:latin typeface="Arial" panose="020B0604020202020204" pitchFamily="34" charset="0"/>
                 <a:cs typeface="Arial" panose="020B0604020202020204" pitchFamily="34" charset="0"/>
               </a:rPr>
-              <a:t> 0.937 – 0.945 </a:t>
-            </a:r>
-            <a:r>
-              <a:rPr dirty="0" err="1">
-                <a:latin typeface="Arial" panose="020B0604020202020204" pitchFamily="34" charset="0"/>
-                <a:cs typeface="Arial" panose="020B0604020202020204" pitchFamily="34" charset="0"/>
-              </a:rPr>
-              <a:t>p.u</a:t>
-            </a:r>
-            <a:r>
-              <a:rPr dirty="0">
-                <a:latin typeface="Arial" panose="020B0604020202020204" pitchFamily="34" charset="0"/>
-                <a:cs typeface="Arial" panose="020B0604020202020204" pitchFamily="34" charset="0"/>
-              </a:rPr>
-              <a:t>.</a:t>
+              <a:t> −2.094 rad</a:t>
             </a:r>
           </a:p>
         </p:txBody>
@@ -12706,11 +12152,18 @@
               </a:defRPr>
             </a:pPr>
             <a:r>
+              <a:rPr dirty="0" err="1">
+                <a:latin typeface="Arial" panose="020B0604020202020204" pitchFamily="34" charset="0"/>
+                <a:cs typeface="Arial" panose="020B0604020202020204" pitchFamily="34" charset="0"/>
+              </a:rPr>
+              <a:t>Faza</a:t>
+            </a:r>
+            <a:r>
               <a:rPr dirty="0">
                 <a:latin typeface="Arial" panose="020B0604020202020204" pitchFamily="34" charset="0"/>
                 <a:cs typeface="Arial" panose="020B0604020202020204" pitchFamily="34" charset="0"/>
               </a:rPr>
-              <a:t>V4</a:t>
+              <a:t> C</a:t>
             </a:r>
           </a:p>
           <a:p>
@@ -12729,42 +12182,14 @@
                 <a:latin typeface="Arial" panose="020B0604020202020204" pitchFamily="34" charset="0"/>
                 <a:cs typeface="Arial" panose="020B0604020202020204" pitchFamily="34" charset="0"/>
               </a:rPr>
-              <a:t>najveći</a:t>
+              <a:t>oko</a:t>
             </a:r>
             <a:r>
               <a:rPr dirty="0">
                 <a:latin typeface="Arial" panose="020B0604020202020204" pitchFamily="34" charset="0"/>
                 <a:cs typeface="Arial" panose="020B0604020202020204" pitchFamily="34" charset="0"/>
               </a:rPr>
-              <a:t> pad: </a:t>
-            </a:r>
-            <a:r>
-              <a:rPr dirty="0" err="1">
-                <a:latin typeface="Arial" panose="020B0604020202020204" pitchFamily="34" charset="0"/>
-                <a:cs typeface="Arial" panose="020B0604020202020204" pitchFamily="34" charset="0"/>
-              </a:rPr>
-              <a:t>oko</a:t>
-            </a:r>
-            <a:r>
-              <a:rPr dirty="0">
-                <a:latin typeface="Arial" panose="020B0604020202020204" pitchFamily="34" charset="0"/>
-                <a:cs typeface="Arial" panose="020B0604020202020204" pitchFamily="34" charset="0"/>
-              </a:rPr>
-              <a:t> 0.806 – 0.864 </a:t>
-            </a:r>
-            <a:r>
-              <a:rPr dirty="0" err="1">
-                <a:latin typeface="Arial" panose="020B0604020202020204" pitchFamily="34" charset="0"/>
-                <a:cs typeface="Arial" panose="020B0604020202020204" pitchFamily="34" charset="0"/>
-              </a:rPr>
-              <a:t>p.u</a:t>
-            </a:r>
-            <a:r>
-              <a:rPr dirty="0">
-                <a:latin typeface="Arial" panose="020B0604020202020204" pitchFamily="34" charset="0"/>
-                <a:cs typeface="Arial" panose="020B0604020202020204" pitchFamily="34" charset="0"/>
-              </a:rPr>
-              <a:t>.</a:t>
+              <a:t> +2.094 rad</a:t>
             </a:r>
           </a:p>
         </p:txBody>
@@ -12772,7 +12197,7 @@
     </p:spTree>
     <p:extLst>
       <p:ext uri="{BB962C8B-B14F-4D97-AF65-F5344CB8AC3E}">
-        <p14:creationId xmlns:p14="http://schemas.microsoft.com/office/powerpoint/2010/main" val="3255945694"/>
+        <p14:creationId xmlns:p14="http://schemas.microsoft.com/office/powerpoint/2010/main" val="3141492818"/>
       </p:ext>
     </p:extLst>
   </p:cSld>
